--- a/apresentacao.pptx
+++ b/apresentacao.pptx
@@ -14,6 +14,10 @@
     <p:sldId id="262" r:id="rId13"/>
     <p:sldId id="263" r:id="rId14"/>
     <p:sldId id="264" r:id="rId15"/>
+    <p:sldId id="265" r:id="rId16"/>
+    <p:sldId id="266" r:id="rId17"/>
+    <p:sldId id="267" r:id="rId18"/>
+    <p:sldId id="268" r:id="rId19"/>
   </p:sldIdLst>
   <p:sldSz cx="12191695" cy="6858000" type="screen4x3"/>
   <p:notesSz cx="6858000" cy="9144000"/>
@@ -3112,8 +3116,8 @@
         </p:nvSpPr>
         <p:spPr>
           <a:xfrm>
-            <a:off x="914400" y="2560320"/>
-            <a:ext cx="10332720" cy="45720"/>
+            <a:off x="914400" y="2743200"/>
+            <a:ext cx="10332720" cy="36576"/>
           </a:xfrm>
           <a:prstGeom prst="rect">
             <a:avLst/>
@@ -3170,7 +3174,7 @@
           <a:lstStyle/>
           <a:p>
             <a:pPr algn="ctr">
-              <a:defRPr sz="4800" b="1">
+              <a:defRPr sz="5200" b="1">
                 <a:solidFill>
                   <a:srgbClr val="00D2FF"/>
                 </a:solidFill>
@@ -3190,8 +3194,8 @@
         </p:nvSpPr>
         <p:spPr>
           <a:xfrm>
-            <a:off x="914400" y="2743200"/>
-            <a:ext cx="10332720" cy="914400"/>
+            <a:off x="914400" y="3017520"/>
+            <a:ext cx="10332720" cy="731520"/>
           </a:xfrm>
           <a:prstGeom prst="rect">
             <a:avLst/>
@@ -3205,14 +3209,14 @@
           <a:lstStyle/>
           <a:p>
             <a:pPr algn="ctr">
-              <a:defRPr sz="2400" b="0">
-                <a:solidFill>
-                  <a:srgbClr val="FFFFFF"/>
-                </a:solidFill>
-              </a:defRPr>
-            </a:pPr>
-            <a:r>
-              <a:t>Visualizador 3D Completo - Computacao Grafica 2026/1</a:t>
+              <a:defRPr sz="2800" b="0">
+                <a:solidFill>
+                  <a:srgbClr val="FFFFFF"/>
+                </a:solidFill>
+              </a:defRPr>
+            </a:pPr>
+            <a:r>
+              <a:t>Visualizador 3D Completo</a:t>
             </a:r>
           </a:p>
         </p:txBody>
@@ -3225,8 +3229,8 @@
         </p:nvSpPr>
         <p:spPr>
           <a:xfrm>
-            <a:off x="914400" y="3840480"/>
-            <a:ext cx="10332720" cy="457200"/>
+            <a:off x="914400" y="3931920"/>
+            <a:ext cx="10332720" cy="548640"/>
           </a:xfrm>
           <a:prstGeom prst="rect">
             <a:avLst/>
@@ -3247,7 +3251,7 @@
               </a:defRPr>
             </a:pPr>
             <a:r>
-              <a:t>Unisinos - Ciencia da Computacao (Hibrido)</a:t>
+              <a:t>Computacao Grafica 2026/1  |  Unisinos</a:t>
             </a:r>
           </a:p>
         </p:txBody>
@@ -3260,7 +3264,7 @@
         </p:nvSpPr>
         <p:spPr>
           <a:xfrm>
-            <a:off x="914400" y="4572000"/>
+            <a:off x="914400" y="4754880"/>
             <a:ext cx="10332720" cy="457200"/>
           </a:xfrm>
           <a:prstGeom prst="rect">
@@ -3283,6 +3287,1818 @@
             </a:pPr>
             <a:r>
               <a:t>Aluno: amarqs182</a:t>
+            </a:r>
+          </a:p>
+        </p:txBody>
+      </p:sp>
+    </p:spTree>
+  </p:cSld>
+  <p:clrMapOvr>
+    <a:masterClrMapping/>
+  </p:clrMapOvr>
+</p:sld>
+</file>
+
+<file path=ppt/slides/slide10.xml><?xml version="1.0" encoding="utf-8"?>
+<p:sld xmlns:a="http://schemas.openxmlformats.org/drawingml/2006/main" xmlns:p="http://schemas.openxmlformats.org/presentationml/2006/main" xmlns:r="http://schemas.openxmlformats.org/officeDocument/2006/relationships">
+  <p:cSld>
+    <p:bg>
+      <p:bgPr>
+        <a:solidFill>
+          <a:srgbClr val="1A1A2E"/>
+        </a:solidFill>
+        <a:effectLst/>
+      </p:bgPr>
+    </p:bg>
+    <p:spTree>
+      <p:nvGrpSpPr>
+        <p:cNvPr id="1" name=""/>
+        <p:cNvGrpSpPr/>
+        <p:nvPr/>
+      </p:nvGrpSpPr>
+      <p:grpSpPr/>
+      <p:sp>
+        <p:nvSpPr>
+          <p:cNvPr id="2" name="TextBox 1"/>
+          <p:cNvSpPr txBox="1"/>
+          <p:nvPr/>
+        </p:nvSpPr>
+        <p:spPr>
+          <a:xfrm>
+            <a:off x="731520" y="365760"/>
+            <a:ext cx="10698480" cy="731520"/>
+          </a:xfrm>
+          <a:prstGeom prst="rect">
+            <a:avLst/>
+          </a:prstGeom>
+          <a:noFill/>
+        </p:spPr>
+        <p:txBody>
+          <a:bodyPr wrap="square">
+            <a:spAutoFit/>
+          </a:bodyPr>
+          <a:lstStyle/>
+          <a:p>
+            <a:pPr algn="l">
+              <a:defRPr sz="3600" b="1">
+                <a:solidFill>
+                  <a:srgbClr val="00D2FF"/>
+                </a:solidFill>
+              </a:defRPr>
+            </a:pPr>
+            <a:r>
+              <a:t>Animacao com Curvas de Bezier</a:t>
+            </a:r>
+          </a:p>
+        </p:txBody>
+      </p:sp>
+      <p:sp>
+        <p:nvSpPr>
+          <p:cNvPr id="3" name="Rectangle 2"/>
+          <p:cNvSpPr/>
+          <p:nvPr/>
+        </p:nvSpPr>
+        <p:spPr>
+          <a:xfrm>
+            <a:off x="731520" y="1097280"/>
+            <a:ext cx="4572000" cy="36576"/>
+          </a:xfrm>
+          <a:prstGeom prst="rect">
+            <a:avLst/>
+          </a:prstGeom>
+          <a:solidFill>
+            <a:srgbClr val="00D2FF"/>
+          </a:solidFill>
+          <a:ln>
+            <a:noFill/>
+          </a:ln>
+        </p:spPr>
+        <p:style>
+          <a:lnRef idx="1">
+            <a:schemeClr val="accent1"/>
+          </a:lnRef>
+          <a:fillRef idx="3">
+            <a:schemeClr val="accent1"/>
+          </a:fillRef>
+          <a:effectRef idx="2">
+            <a:schemeClr val="accent1"/>
+          </a:effectRef>
+          <a:fontRef idx="minor">
+            <a:schemeClr val="lt1"/>
+          </a:fontRef>
+        </p:style>
+        <p:txBody>
+          <a:bodyPr rtlCol="0" anchor="ctr"/>
+          <a:lstStyle/>
+          <a:p>
+            <a:pPr algn="ctr"/>
+          </a:p>
+        </p:txBody>
+      </p:sp>
+      <p:sp>
+        <p:nvSpPr>
+          <p:cNvPr id="4" name="TextBox 3"/>
+          <p:cNvSpPr txBox="1"/>
+          <p:nvPr/>
+        </p:nvSpPr>
+        <p:spPr>
+          <a:xfrm>
+            <a:off x="731520" y="1463040"/>
+            <a:ext cx="10698480" cy="1097280"/>
+          </a:xfrm>
+          <a:prstGeom prst="rect">
+            <a:avLst/>
+          </a:prstGeom>
+          <a:noFill/>
+        </p:spPr>
+        <p:txBody>
+          <a:bodyPr wrap="square">
+            <a:spAutoFit/>
+          </a:bodyPr>
+          <a:lstStyle/>
+          <a:p>
+            <a:pPr>
+              <a:spcAft>
+                <a:spcPts val="400"/>
+              </a:spcAft>
+              <a:defRPr sz="2000">
+                <a:solidFill>
+                  <a:srgbClr val="FFFFFF"/>
+                </a:solidFill>
+              </a:defRPr>
+            </a:pPr>
+            <a:r>
+              <a:t>Objetos percorrem trajetorias definidas por curvas parametricas</a:t>
+            </a:r>
+          </a:p>
+        </p:txBody>
+      </p:sp>
+      <p:sp>
+        <p:nvSpPr>
+          <p:cNvPr id="5" name="TextBox 4"/>
+          <p:cNvSpPr txBox="1"/>
+          <p:nvPr/>
+        </p:nvSpPr>
+        <p:spPr>
+          <a:xfrm>
+            <a:off x="731520" y="2286000"/>
+            <a:ext cx="5029200" cy="457200"/>
+          </a:xfrm>
+          <a:prstGeom prst="rect">
+            <a:avLst/>
+          </a:prstGeom>
+          <a:noFill/>
+        </p:spPr>
+        <p:txBody>
+          <a:bodyPr wrap="square">
+            <a:spAutoFit/>
+          </a:bodyPr>
+          <a:lstStyle/>
+          <a:p>
+            <a:pPr algn="l">
+              <a:defRPr sz="2200" b="1">
+                <a:solidFill>
+                  <a:srgbClr val="00E676"/>
+                </a:solidFill>
+              </a:defRPr>
+            </a:pPr>
+            <a:r>
+              <a:t>Controles</a:t>
+            </a:r>
+          </a:p>
+        </p:txBody>
+      </p:sp>
+      <p:sp>
+        <p:nvSpPr>
+          <p:cNvPr id="6" name="TextBox 5"/>
+          <p:cNvSpPr txBox="1"/>
+          <p:nvPr/>
+        </p:nvSpPr>
+        <p:spPr>
+          <a:xfrm>
+            <a:off x="731520" y="2743200"/>
+            <a:ext cx="5029200" cy="3200400"/>
+          </a:xfrm>
+          <a:prstGeom prst="rect">
+            <a:avLst/>
+          </a:prstGeom>
+          <a:noFill/>
+        </p:spPr>
+        <p:txBody>
+          <a:bodyPr wrap="square">
+            <a:spAutoFit/>
+          </a:bodyPr>
+          <a:lstStyle/>
+          <a:p>
+            <a:pPr>
+              <a:spcAft>
+                <a:spcPts val="200"/>
+              </a:spcAft>
+              <a:defRPr sz="1600">
+                <a:solidFill>
+                  <a:srgbClr val="FFFFFF"/>
+                </a:solidFill>
+              </a:defRPr>
+            </a:pPr>
+            <a:r>
+              <a:t>SPACE  -  Ativar/desativar trajetoria</a:t>
+            </a:r>
+          </a:p>
+          <a:p>
+            <a:pPr>
+              <a:spcAft>
+                <a:spcPts val="200"/>
+              </a:spcAft>
+              <a:defRPr sz="1600">
+                <a:solidFill>
+                  <a:srgbClr val="FFFFFF"/>
+                </a:solidFill>
+              </a:defRPr>
+            </a:pPr>
+            <a:r>
+              <a:t>B  -  Alternar modo Bezier</a:t>
+            </a:r>
+          </a:p>
+          <a:p>
+            <a:pPr>
+              <a:spcAft>
+                <a:spcPts val="200"/>
+              </a:spcAft>
+              <a:defRPr sz="1600">
+                <a:solidFill>
+                  <a:srgbClr val="FFFFFF"/>
+                </a:solidFill>
+              </a:defRPr>
+            </a:pPr>
+            <a:r>
+              <a:t>1  -  Adicionar ponto de controle</a:t>
+            </a:r>
+          </a:p>
+          <a:p>
+            <a:pPr>
+              <a:spcAft>
+                <a:spcPts val="200"/>
+              </a:spcAft>
+              <a:defRPr sz="1600">
+                <a:solidFill>
+                  <a:srgbClr val="FFFFFF"/>
+                </a:solidFill>
+              </a:defRPr>
+            </a:pPr>
+            <a:r>
+              <a:t>2  -  Remover ultimo ponto</a:t>
+            </a:r>
+          </a:p>
+          <a:p>
+            <a:pPr>
+              <a:spcAft>
+                <a:spcPts val="200"/>
+              </a:spcAft>
+              <a:defRPr sz="1600">
+                <a:solidFill>
+                  <a:srgbClr val="FFFFFF"/>
+                </a:solidFill>
+              </a:defRPr>
+            </a:pPr>
+            <a:r>
+              <a:t>3  -  Limpar todos os pontos</a:t>
+            </a:r>
+          </a:p>
+          <a:p>
+            <a:pPr>
+              <a:spcAft>
+                <a:spcPts val="200"/>
+              </a:spcAft>
+              <a:defRPr sz="1600">
+                <a:solidFill>
+                  <a:srgbClr val="FFFFFF"/>
+                </a:solidFill>
+              </a:defRPr>
+            </a:pPr>
+            <a:r>
+              <a:t>4  -  Adicionar ponto Bezier</a:t>
+            </a:r>
+          </a:p>
+          <a:p>
+            <a:pPr>
+              <a:spcAft>
+                <a:spcPts val="200"/>
+              </a:spcAft>
+              <a:defRPr sz="1600">
+                <a:solidFill>
+                  <a:srgbClr val="FFFFFF"/>
+                </a:solidFill>
+              </a:defRPr>
+            </a:pPr>
+            <a:r>
+              <a:t>5  -  Remover ponto Bezier</a:t>
+            </a:r>
+          </a:p>
+          <a:p>
+            <a:pPr>
+              <a:spcAft>
+                <a:spcPts val="200"/>
+              </a:spcAft>
+              <a:defRPr sz="1600">
+                <a:solidFill>
+                  <a:srgbClr val="FFFFFF"/>
+                </a:solidFill>
+              </a:defRPr>
+            </a:pPr>
+            <a:r>
+              <a:t>R  -  Resetar trajetoria</a:t>
+            </a:r>
+          </a:p>
+          <a:p>
+            <a:pPr>
+              <a:spcAft>
+                <a:spcPts val="200"/>
+              </a:spcAft>
+              <a:defRPr sz="1600">
+                <a:solidFill>
+                  <a:srgbClr val="FFFFFF"/>
+                </a:solidFill>
+              </a:defRPr>
+            </a:pPr>
+            <a:r>
+              <a:t>UP/DOWN  -  Ajustar velocidade</a:t>
+            </a:r>
+          </a:p>
+        </p:txBody>
+      </p:sp>
+      <p:sp>
+        <p:nvSpPr>
+          <p:cNvPr id="7" name="TextBox 6"/>
+          <p:cNvSpPr txBox="1"/>
+          <p:nvPr/>
+        </p:nvSpPr>
+        <p:spPr>
+          <a:xfrm>
+            <a:off x="6400800" y="2286000"/>
+            <a:ext cx="5029200" cy="457200"/>
+          </a:xfrm>
+          <a:prstGeom prst="rect">
+            <a:avLst/>
+          </a:prstGeom>
+          <a:noFill/>
+        </p:spPr>
+        <p:txBody>
+          <a:bodyPr wrap="square">
+            <a:spAutoFit/>
+          </a:bodyPr>
+          <a:lstStyle/>
+          <a:p>
+            <a:pPr algn="l">
+              <a:defRPr sz="2200" b="1">
+                <a:solidFill>
+                  <a:srgbClr val="00E676"/>
+                </a:solidFill>
+              </a:defRPr>
+            </a:pPr>
+            <a:r>
+              <a:t>Modos</a:t>
+            </a:r>
+          </a:p>
+        </p:txBody>
+      </p:sp>
+      <p:sp>
+        <p:nvSpPr>
+          <p:cNvPr id="8" name="TextBox 7"/>
+          <p:cNvSpPr txBox="1"/>
+          <p:nvPr/>
+        </p:nvSpPr>
+        <p:spPr>
+          <a:xfrm>
+            <a:off x="6400800" y="2743200"/>
+            <a:ext cx="5029200" cy="1828800"/>
+          </a:xfrm>
+          <a:prstGeom prst="rect">
+            <a:avLst/>
+          </a:prstGeom>
+          <a:noFill/>
+        </p:spPr>
+        <p:txBody>
+          <a:bodyPr wrap="square">
+            <a:spAutoFit/>
+          </a:bodyPr>
+          <a:lstStyle/>
+          <a:p>
+            <a:pPr>
+              <a:spcAft>
+                <a:spcPts val="300"/>
+              </a:spcAft>
+              <a:defRPr sz="1600">
+                <a:solidFill>
+                  <a:srgbClr val="FFFFFF"/>
+                </a:solidFill>
+              </a:defRPr>
+            </a:pPr>
+            <a:r>
+              <a:t>Linear  -  Interpolacao entre pontos</a:t>
+            </a:r>
+          </a:p>
+          <a:p>
+            <a:pPr>
+              <a:spcAft>
+                <a:spcPts val="300"/>
+              </a:spcAft>
+              <a:defRPr sz="1600">
+                <a:solidFill>
+                  <a:srgbClr val="FFFFFF"/>
+                </a:solidFill>
+              </a:defRPr>
+            </a:pPr>
+            <a:r>
+              <a:t>     glm::mix(p1, p2, t)</a:t>
+            </a:r>
+          </a:p>
+          <a:p>
+            <a:pPr>
+              <a:spcAft>
+                <a:spcPts val="300"/>
+              </a:spcAft>
+              <a:defRPr sz="1600">
+                <a:solidFill>
+                  <a:srgbClr val="FFFFFF"/>
+                </a:solidFill>
+              </a:defRPr>
+            </a:pPr>
+          </a:p>
+          <a:p>
+            <a:pPr>
+              <a:spcAft>
+                <a:spcPts val="300"/>
+              </a:spcAft>
+              <a:defRPr sz="1600">
+                <a:solidFill>
+                  <a:srgbClr val="FFFFFF"/>
+                </a:solidFill>
+              </a:defRPr>
+            </a:pPr>
+            <a:r>
+              <a:t>Bezier  -  Curva de grau N</a:t>
+            </a:r>
+          </a:p>
+          <a:p>
+            <a:pPr>
+              <a:spcAft>
+                <a:spcPts val="300"/>
+              </a:spcAft>
+              <a:defRPr sz="1600">
+                <a:solidFill>
+                  <a:srgbClr val="FFFFFF"/>
+                </a:solidFill>
+              </a:defRPr>
+            </a:pPr>
+            <a:r>
+              <a:t>     Algoritmo de De Casteljau</a:t>
+            </a:r>
+          </a:p>
+        </p:txBody>
+      </p:sp>
+      <p:sp>
+        <p:nvSpPr>
+          <p:cNvPr id="9" name="TextBox 8"/>
+          <p:cNvSpPr txBox="1"/>
+          <p:nvPr/>
+        </p:nvSpPr>
+        <p:spPr>
+          <a:xfrm>
+            <a:off x="731520" y="5029200"/>
+            <a:ext cx="10698480" cy="1371600"/>
+          </a:xfrm>
+          <a:prstGeom prst="rect">
+            <a:avLst/>
+          </a:prstGeom>
+          <a:noFill/>
+        </p:spPr>
+        <p:txBody>
+          <a:bodyPr wrap="square">
+            <a:spAutoFit/>
+          </a:bodyPr>
+          <a:lstStyle/>
+          <a:p>
+            <a:pPr>
+              <a:spcAft>
+                <a:spcPts val="200"/>
+              </a:spcAft>
+              <a:defRPr sz="1400">
+                <a:solidFill>
+                  <a:srgbClr val="00E676"/>
+                </a:solidFill>
+                <a:latin typeface="Consolas"/>
+              </a:defRPr>
+            </a:pPr>
+            <a:r>
+              <a:t>// De Casteljau - avaliacao de curva de Bezier</a:t>
+            </a:r>
+          </a:p>
+          <a:p>
+            <a:pPr>
+              <a:spcAft>
+                <a:spcPts val="200"/>
+              </a:spcAft>
+              <a:defRPr sz="1400">
+                <a:solidFill>
+                  <a:srgbClr val="00E676"/>
+                </a:solidFill>
+                <a:latin typeface="Consolas"/>
+              </a:defRPr>
+            </a:pPr>
+            <a:r>
+              <a:t>for (int k = 1; k &lt; n; k++)</a:t>
+            </a:r>
+          </a:p>
+          <a:p>
+            <a:pPr>
+              <a:spcAft>
+                <a:spcPts val="200"/>
+              </a:spcAft>
+              <a:defRPr sz="1400">
+                <a:solidFill>
+                  <a:srgbClr val="00E676"/>
+                </a:solidFill>
+                <a:latin typeface="Consolas"/>
+              </a:defRPr>
+            </a:pPr>
+            <a:r>
+              <a:t>    for (int i = 0; i &lt; n - k; i++)</a:t>
+            </a:r>
+          </a:p>
+          <a:p>
+            <a:pPr>
+              <a:spcAft>
+                <a:spcPts val="200"/>
+              </a:spcAft>
+              <a:defRPr sz="1400">
+                <a:solidFill>
+                  <a:srgbClr val="00E676"/>
+                </a:solidFill>
+                <a:latin typeface="Consolas"/>
+              </a:defRPr>
+            </a:pPr>
+            <a:r>
+              <a:t>        temp[i] = glm::mix(temp[i], temp[i+1], t);</a:t>
+            </a:r>
+          </a:p>
+        </p:txBody>
+      </p:sp>
+      <p:sp>
+        <p:nvSpPr>
+          <p:cNvPr id="10" name="Rounded Rectangle 9"/>
+          <p:cNvSpPr/>
+          <p:nvPr/>
+        </p:nvSpPr>
+        <p:spPr>
+          <a:xfrm>
+            <a:off x="640080" y="4937760"/>
+            <a:ext cx="10881359" cy="1554480"/>
+          </a:xfrm>
+          <a:prstGeom prst="roundRect">
+            <a:avLst/>
+          </a:prstGeom>
+          <a:solidFill>
+            <a:srgbClr val="0D1117"/>
+          </a:solidFill>
+          <a:ln>
+            <a:noFill/>
+          </a:ln>
+        </p:spPr>
+        <p:style>
+          <a:lnRef idx="1">
+            <a:schemeClr val="accent1"/>
+          </a:lnRef>
+          <a:fillRef idx="3">
+            <a:schemeClr val="accent1"/>
+          </a:fillRef>
+          <a:effectRef idx="2">
+            <a:schemeClr val="accent1"/>
+          </a:effectRef>
+          <a:fontRef idx="minor">
+            <a:schemeClr val="lt1"/>
+          </a:fontRef>
+        </p:style>
+        <p:txBody>
+          <a:bodyPr rtlCol="0" anchor="ctr"/>
+          <a:lstStyle/>
+          <a:p>
+            <a:pPr algn="ctr"/>
+          </a:p>
+        </p:txBody>
+      </p:sp>
+    </p:spTree>
+  </p:cSld>
+  <p:clrMapOvr>
+    <a:masterClrMapping/>
+  </p:clrMapOvr>
+</p:sld>
+</file>
+
+<file path=ppt/slides/slide11.xml><?xml version="1.0" encoding="utf-8"?>
+<p:sld xmlns:a="http://schemas.openxmlformats.org/drawingml/2006/main" xmlns:p="http://schemas.openxmlformats.org/presentationml/2006/main" xmlns:r="http://schemas.openxmlformats.org/officeDocument/2006/relationships">
+  <p:cSld>
+    <p:bg>
+      <p:bgPr>
+        <a:solidFill>
+          <a:srgbClr val="1A1A2E"/>
+        </a:solidFill>
+        <a:effectLst/>
+      </p:bgPr>
+    </p:bg>
+    <p:spTree>
+      <p:nvGrpSpPr>
+        <p:cNvPr id="1" name=""/>
+        <p:cNvGrpSpPr/>
+        <p:nvPr/>
+      </p:nvGrpSpPr>
+      <p:grpSpPr/>
+      <p:sp>
+        <p:nvSpPr>
+          <p:cNvPr id="2" name="TextBox 1"/>
+          <p:cNvSpPr txBox="1"/>
+          <p:nvPr/>
+        </p:nvSpPr>
+        <p:spPr>
+          <a:xfrm>
+            <a:off x="731520" y="365760"/>
+            <a:ext cx="10698480" cy="731520"/>
+          </a:xfrm>
+          <a:prstGeom prst="rect">
+            <a:avLst/>
+          </a:prstGeom>
+          <a:noFill/>
+        </p:spPr>
+        <p:txBody>
+          <a:bodyPr wrap="square">
+            <a:spAutoFit/>
+          </a:bodyPr>
+          <a:lstStyle/>
+          <a:p>
+            <a:pPr algn="l">
+              <a:defRPr sz="3600" b="1">
+                <a:solidFill>
+                  <a:srgbClr val="00D2FF"/>
+                </a:solidFill>
+              </a:defRPr>
+            </a:pPr>
+            <a:r>
+              <a:t>Desafios Tecnicos</a:t>
+            </a:r>
+          </a:p>
+        </p:txBody>
+      </p:sp>
+      <p:sp>
+        <p:nvSpPr>
+          <p:cNvPr id="3" name="Rectangle 2"/>
+          <p:cNvSpPr/>
+          <p:nvPr/>
+        </p:nvSpPr>
+        <p:spPr>
+          <a:xfrm>
+            <a:off x="731520" y="1097280"/>
+            <a:ext cx="3657600" cy="36576"/>
+          </a:xfrm>
+          <a:prstGeom prst="rect">
+            <a:avLst/>
+          </a:prstGeom>
+          <a:solidFill>
+            <a:srgbClr val="00D2FF"/>
+          </a:solidFill>
+          <a:ln>
+            <a:noFill/>
+          </a:ln>
+        </p:spPr>
+        <p:style>
+          <a:lnRef idx="1">
+            <a:schemeClr val="accent1"/>
+          </a:lnRef>
+          <a:fillRef idx="3">
+            <a:schemeClr val="accent1"/>
+          </a:fillRef>
+          <a:effectRef idx="2">
+            <a:schemeClr val="accent1"/>
+          </a:effectRef>
+          <a:fontRef idx="minor">
+            <a:schemeClr val="lt1"/>
+          </a:fontRef>
+        </p:style>
+        <p:txBody>
+          <a:bodyPr rtlCol="0" anchor="ctr"/>
+          <a:lstStyle/>
+          <a:p>
+            <a:pPr algn="ctr"/>
+          </a:p>
+        </p:txBody>
+      </p:sp>
+      <p:sp>
+        <p:nvSpPr>
+          <p:cNvPr id="4" name="TextBox 3"/>
+          <p:cNvSpPr txBox="1"/>
+          <p:nvPr/>
+        </p:nvSpPr>
+        <p:spPr>
+          <a:xfrm>
+            <a:off x="731520" y="1463040"/>
+            <a:ext cx="5029200" cy="457200"/>
+          </a:xfrm>
+          <a:prstGeom prst="rect">
+            <a:avLst/>
+          </a:prstGeom>
+          <a:noFill/>
+        </p:spPr>
+        <p:txBody>
+          <a:bodyPr wrap="square">
+            <a:spAutoFit/>
+          </a:bodyPr>
+          <a:lstStyle/>
+          <a:p>
+            <a:pPr algn="l">
+              <a:defRPr sz="2200" b="1">
+                <a:solidFill>
+                  <a:srgbClr val="FF4444"/>
+                </a:solidFill>
+              </a:defRPr>
+            </a:pPr>
+            <a:r>
+              <a:t>Problema: SIGSEGV</a:t>
+            </a:r>
+          </a:p>
+        </p:txBody>
+      </p:sp>
+      <p:sp>
+        <p:nvSpPr>
+          <p:cNvPr id="5" name="TextBox 4"/>
+          <p:cNvSpPr txBox="1"/>
+          <p:nvPr/>
+        </p:nvSpPr>
+        <p:spPr>
+          <a:xfrm>
+            <a:off x="731520" y="1920240"/>
+            <a:ext cx="5029200" cy="2286000"/>
+          </a:xfrm>
+          <a:prstGeom prst="rect">
+            <a:avLst/>
+          </a:prstGeom>
+          <a:noFill/>
+        </p:spPr>
+        <p:txBody>
+          <a:bodyPr wrap="square">
+            <a:spAutoFit/>
+          </a:bodyPr>
+          <a:lstStyle/>
+          <a:p>
+            <a:pPr>
+              <a:spcAft>
+                <a:spcPts val="300"/>
+              </a:spcAft>
+              <a:defRPr sz="1600">
+                <a:solidFill>
+                  <a:srgbClr val="FFFFFF"/>
+                </a:solidFill>
+              </a:defRPr>
+            </a:pPr>
+            <a:r>
+              <a:t>Crash发生在 4-8 segundos apos inicio</a:t>
+            </a:r>
+          </a:p>
+          <a:p>
+            <a:pPr>
+              <a:spcAft>
+                <a:spcPts val="300"/>
+              </a:spcAft>
+              <a:defRPr sz="1600">
+                <a:solidFill>
+                  <a:srgbClr val="FFFFFF"/>
+                </a:solidFill>
+              </a:defRPr>
+            </a:pPr>
+            <a:r>
+              <a:t>Causa: SceneObject* apontava para</a:t>
+            </a:r>
+          </a:p>
+          <a:p>
+            <a:pPr>
+              <a:spcAft>
+                <a:spcPts val="300"/>
+              </a:spcAft>
+              <a:defRPr sz="1600">
+                <a:solidFill>
+                  <a:srgbClr val="FFFFFF"/>
+                </a:solidFill>
+              </a:defRPr>
+            </a:pPr>
+            <a:r>
+              <a:t>variavel local destruida (dangling pointer)</a:t>
+            </a:r>
+          </a:p>
+          <a:p>
+            <a:pPr>
+              <a:spcAft>
+                <a:spcPts val="300"/>
+              </a:spcAft>
+              <a:defRPr sz="1600">
+                <a:solidFill>
+                  <a:srgbClr val="FFFFFF"/>
+                </a:solidFill>
+              </a:defRPr>
+            </a:pPr>
+          </a:p>
+          <a:p>
+            <a:pPr>
+              <a:spcAft>
+                <a:spcPts val="300"/>
+              </a:spcAft>
+              <a:defRPr sz="1600">
+                <a:solidFill>
+                  <a:srgbClr val="FFFFFF"/>
+                </a:solidFill>
+              </a:defRPr>
+            </a:pPr>
+            <a:r>
+              <a:t>Solucao: mudar de ponteiro para valor</a:t>
+            </a:r>
+          </a:p>
+          <a:p>
+            <a:pPr>
+              <a:spcAft>
+                <a:spcPts val="300"/>
+              </a:spcAft>
+              <a:defRPr sz="1600">
+                <a:solidFill>
+                  <a:srgbClr val="FFFFFF"/>
+                </a:solidFill>
+              </a:defRPr>
+            </a:pPr>
+            <a:r>
+              <a:t>   SceneObject* config  -&gt;  SceneObject config</a:t>
+            </a:r>
+          </a:p>
+        </p:txBody>
+      </p:sp>
+      <p:sp>
+        <p:nvSpPr>
+          <p:cNvPr id="6" name="TextBox 5"/>
+          <p:cNvSpPr txBox="1"/>
+          <p:nvPr/>
+        </p:nvSpPr>
+        <p:spPr>
+          <a:xfrm>
+            <a:off x="6400800" y="1463040"/>
+            <a:ext cx="5029200" cy="457200"/>
+          </a:xfrm>
+          <a:prstGeom prst="rect">
+            <a:avLst/>
+          </a:prstGeom>
+          <a:noFill/>
+        </p:spPr>
+        <p:txBody>
+          <a:bodyPr wrap="square">
+            <a:spAutoFit/>
+          </a:bodyPr>
+          <a:lstStyle/>
+          <a:p>
+            <a:pPr algn="l">
+              <a:defRPr sz="2200" b="1">
+                <a:solidFill>
+                  <a:srgbClr val="FF8C00"/>
+                </a:solidFill>
+              </a:defRPr>
+            </a:pPr>
+            <a:r>
+              <a:t>Incompatibilidade de Shaders</a:t>
+            </a:r>
+          </a:p>
+        </p:txBody>
+      </p:sp>
+      <p:sp>
+        <p:nvSpPr>
+          <p:cNvPr id="7" name="TextBox 6"/>
+          <p:cNvSpPr txBox="1"/>
+          <p:nvPr/>
+        </p:nvSpPr>
+        <p:spPr>
+          <a:xfrm>
+            <a:off x="6400800" y="1920240"/>
+            <a:ext cx="5029200" cy="2286000"/>
+          </a:xfrm>
+          <a:prstGeom prst="rect">
+            <a:avLst/>
+          </a:prstGeom>
+          <a:noFill/>
+        </p:spPr>
+        <p:txBody>
+          <a:bodyPr wrap="square">
+            <a:spAutoFit/>
+          </a:bodyPr>
+          <a:lstStyle/>
+          <a:p>
+            <a:pPr>
+              <a:spcAft>
+                <a:spcPts val="300"/>
+              </a:spcAft>
+              <a:defRPr sz="1600">
+                <a:solidFill>
+                  <a:srgbClr val="FFFFFF"/>
+                </a:solidFill>
+              </a:defRPr>
+            </a:pPr>
+            <a:r>
+              <a:t>Shaders usavam #version 450</a:t>
+            </a:r>
+          </a:p>
+          <a:p>
+            <a:pPr>
+              <a:spcAft>
+                <a:spcPts val="300"/>
+              </a:spcAft>
+              <a:defRPr sz="1600">
+                <a:solidFill>
+                  <a:srgbClr val="FFFFFF"/>
+                </a:solidFill>
+              </a:defRPr>
+            </a:pPr>
+            <a:r>
+              <a:t>Contexto OpenGL era 4.1</a:t>
+            </a:r>
+          </a:p>
+          <a:p>
+            <a:pPr>
+              <a:spcAft>
+                <a:spcPts val="300"/>
+              </a:spcAft>
+              <a:defRPr sz="1600">
+                <a:solidFill>
+                  <a:srgbClr val="FFFFFF"/>
+                </a:solidFill>
+              </a:defRPr>
+            </a:pPr>
+          </a:p>
+          <a:p>
+            <a:pPr>
+              <a:spcAft>
+                <a:spcPts val="300"/>
+              </a:spcAft>
+              <a:defRPr sz="1600">
+                <a:solidFill>
+                  <a:srgbClr val="FFFFFF"/>
+                </a:solidFill>
+              </a:defRPr>
+            </a:pPr>
+            <a:r>
+              <a:t>Solucao: alterar para #version 410</a:t>
+            </a:r>
+          </a:p>
+          <a:p>
+            <a:pPr>
+              <a:spcAft>
+                <a:spcPts val="300"/>
+              </a:spcAft>
+              <a:defRPr sz="1600">
+                <a:solidFill>
+                  <a:srgbClr val="FFFFFF"/>
+                </a:solidFill>
+              </a:defRPr>
+            </a:pPr>
+            <a:r>
+              <a:t>para compatibilidade total</a:t>
+            </a:r>
+          </a:p>
+        </p:txBody>
+      </p:sp>
+      <p:sp>
+        <p:nvSpPr>
+          <p:cNvPr id="8" name="TextBox 7"/>
+          <p:cNvSpPr txBox="1"/>
+          <p:nvPr/>
+        </p:nvSpPr>
+        <p:spPr>
+          <a:xfrm>
+            <a:off x="731520" y="4389120"/>
+            <a:ext cx="5029200" cy="457200"/>
+          </a:xfrm>
+          <a:prstGeom prst="rect">
+            <a:avLst/>
+          </a:prstGeom>
+          <a:noFill/>
+        </p:spPr>
+        <p:txBody>
+          <a:bodyPr wrap="square">
+            <a:spAutoFit/>
+          </a:bodyPr>
+          <a:lstStyle/>
+          <a:p>
+            <a:pPr algn="l">
+              <a:defRPr sz="2200" b="1">
+                <a:solidFill>
+                  <a:srgbClr val="FF8C00"/>
+                </a:solidFill>
+              </a:defRPr>
+            </a:pPr>
+            <a:r>
+              <a:t>Shallow Clone</a:t>
+            </a:r>
+          </a:p>
+        </p:txBody>
+      </p:sp>
+      <p:sp>
+        <p:nvSpPr>
+          <p:cNvPr id="9" name="TextBox 8"/>
+          <p:cNvSpPr txBox="1"/>
+          <p:nvPr/>
+        </p:nvSpPr>
+        <p:spPr>
+          <a:xfrm>
+            <a:off x="731520" y="4846320"/>
+            <a:ext cx="5029200" cy="1371600"/>
+          </a:xfrm>
+          <a:prstGeom prst="rect">
+            <a:avLst/>
+          </a:prstGeom>
+          <a:noFill/>
+        </p:spPr>
+        <p:txBody>
+          <a:bodyPr wrap="square">
+            <a:spAutoFit/>
+          </a:bodyPr>
+          <a:lstStyle/>
+          <a:p>
+            <a:pPr>
+              <a:spcAft>
+                <a:spcPts val="300"/>
+              </a:spcAft>
+              <a:defRPr sz="1600">
+                <a:solidFill>
+                  <a:srgbClr val="FFFFFF"/>
+                </a:solidFill>
+              </a:defRPr>
+            </a:pPr>
+            <a:r>
+              <a:t>Git clone era shallow (historia incompleta)</a:t>
+            </a:r>
+          </a:p>
+          <a:p>
+            <a:pPr>
+              <a:spcAft>
+                <a:spcPts val="300"/>
+              </a:spcAft>
+              <a:defRPr sz="1600">
+                <a:solidFill>
+                  <a:srgbClr val="FFFFFF"/>
+                </a:solidFill>
+              </a:defRPr>
+            </a:pPr>
+            <a:r>
+              <a:t>Impedia push para GitHub</a:t>
+            </a:r>
+          </a:p>
+          <a:p>
+            <a:pPr>
+              <a:spcAft>
+                <a:spcPts val="300"/>
+              </a:spcAft>
+              <a:defRPr sz="1600">
+                <a:solidFill>
+                  <a:srgbClr val="FFFFFF"/>
+                </a:solidFill>
+              </a:defRPr>
+            </a:pPr>
+            <a:r>
+              <a:t>Solucao: git fetch --unshallow</a:t>
+            </a:r>
+          </a:p>
+        </p:txBody>
+      </p:sp>
+      <p:sp>
+        <p:nvSpPr>
+          <p:cNvPr id="10" name="TextBox 9"/>
+          <p:cNvSpPr txBox="1"/>
+          <p:nvPr/>
+        </p:nvSpPr>
+        <p:spPr>
+          <a:xfrm>
+            <a:off x="6400800" y="4389120"/>
+            <a:ext cx="5029200" cy="457200"/>
+          </a:xfrm>
+          <a:prstGeom prst="rect">
+            <a:avLst/>
+          </a:prstGeom>
+          <a:noFill/>
+        </p:spPr>
+        <p:txBody>
+          <a:bodyPr wrap="square">
+            <a:spAutoFit/>
+          </a:bodyPr>
+          <a:lstStyle/>
+          <a:p>
+            <a:pPr algn="l">
+              <a:defRPr sz="2200" b="1">
+                <a:solidFill>
+                  <a:srgbClr val="FF8C00"/>
+                </a:solidFill>
+              </a:defRPr>
+            </a:pPr>
+            <a:r>
+              <a:t>Integracao ImGui</a:t>
+            </a:r>
+          </a:p>
+        </p:txBody>
+      </p:sp>
+      <p:sp>
+        <p:nvSpPr>
+          <p:cNvPr id="11" name="TextBox 10"/>
+          <p:cNvSpPr txBox="1"/>
+          <p:nvPr/>
+        </p:nvSpPr>
+        <p:spPr>
+          <a:xfrm>
+            <a:off x="6400800" y="4846320"/>
+            <a:ext cx="5029200" cy="1371600"/>
+          </a:xfrm>
+          <a:prstGeom prst="rect">
+            <a:avLst/>
+          </a:prstGeom>
+          <a:noFill/>
+        </p:spPr>
+        <p:txBody>
+          <a:bodyPr wrap="square">
+            <a:spAutoFit/>
+          </a:bodyPr>
+          <a:lstStyle/>
+          <a:p>
+            <a:pPr>
+              <a:spcAft>
+                <a:spcPts val="300"/>
+              </a:spcAft>
+              <a:defRPr sz="1600">
+                <a:solidFill>
+                  <a:srgbClr val="FFFFFF"/>
+                </a:solidFill>
+              </a:defRPr>
+            </a:pPr>
+            <a:r>
+              <a:t>Init precisa ser feito apos GLAD</a:t>
+            </a:r>
+          </a:p>
+          <a:p>
+            <a:pPr>
+              <a:spcAft>
+                <a:spcPts val="300"/>
+              </a:spcAft>
+              <a:defRPr sz="1600">
+                <a:solidFill>
+                  <a:srgbClr val="FFFFFF"/>
+                </a:solidFill>
+              </a:defRPr>
+            </a:pPr>
+            <a:r>
+              <a:t>NewFrame antes de cada render</a:t>
+            </a:r>
+          </a:p>
+          <a:p>
+            <a:pPr>
+              <a:spcAft>
+                <a:spcPts val="300"/>
+              </a:spcAft>
+              <a:defRPr sz="1600">
+                <a:solidFill>
+                  <a:srgbClr val="FFFFFF"/>
+                </a:solidFill>
+              </a:defRPr>
+            </a:pPr>
+            <a:r>
+              <a:t>RenderDrawData apos cena</a:t>
+            </a:r>
+          </a:p>
+          <a:p>
+            <a:pPr>
+              <a:spcAft>
+                <a:spcPts val="300"/>
+              </a:spcAft>
+              <a:defRPr sz="1600">
+                <a:solidFill>
+                  <a:srgbClr val="FFFFFF"/>
+                </a:solidFill>
+              </a:defRPr>
+            </a:pPr>
+            <a:r>
+              <a:t>Cleanup no final</a:t>
+            </a:r>
+          </a:p>
+        </p:txBody>
+      </p:sp>
+    </p:spTree>
+  </p:cSld>
+  <p:clrMapOvr>
+    <a:masterClrMapping/>
+  </p:clrMapOvr>
+</p:sld>
+</file>
+
+<file path=ppt/slides/slide12.xml><?xml version="1.0" encoding="utf-8"?>
+<p:sld xmlns:a="http://schemas.openxmlformats.org/drawingml/2006/main" xmlns:p="http://schemas.openxmlformats.org/presentationml/2006/main" xmlns:r="http://schemas.openxmlformats.org/officeDocument/2006/relationships">
+  <p:cSld>
+    <p:bg>
+      <p:bgPr>
+        <a:solidFill>
+          <a:srgbClr val="1A1A2E"/>
+        </a:solidFill>
+        <a:effectLst/>
+      </p:bgPr>
+    </p:bg>
+    <p:spTree>
+      <p:nvGrpSpPr>
+        <p:cNvPr id="1" name=""/>
+        <p:cNvGrpSpPr/>
+        <p:nvPr/>
+      </p:nvGrpSpPr>
+      <p:grpSpPr/>
+      <p:sp>
+        <p:nvSpPr>
+          <p:cNvPr id="2" name="TextBox 1"/>
+          <p:cNvSpPr txBox="1"/>
+          <p:nvPr/>
+        </p:nvSpPr>
+        <p:spPr>
+          <a:xfrm>
+            <a:off x="731520" y="365760"/>
+            <a:ext cx="10698480" cy="731520"/>
+          </a:xfrm>
+          <a:prstGeom prst="rect">
+            <a:avLst/>
+          </a:prstGeom>
+          <a:noFill/>
+        </p:spPr>
+        <p:txBody>
+          <a:bodyPr wrap="square">
+            <a:spAutoFit/>
+          </a:bodyPr>
+          <a:lstStyle/>
+          <a:p>
+            <a:pPr algn="l">
+              <a:defRPr sz="3600" b="1">
+                <a:solidFill>
+                  <a:srgbClr val="00D2FF"/>
+                </a:solidFill>
+              </a:defRPr>
+            </a:pPr>
+            <a:r>
+              <a:t>Referencias</a:t>
+            </a:r>
+          </a:p>
+        </p:txBody>
+      </p:sp>
+      <p:sp>
+        <p:nvSpPr>
+          <p:cNvPr id="3" name="Rectangle 2"/>
+          <p:cNvSpPr/>
+          <p:nvPr/>
+        </p:nvSpPr>
+        <p:spPr>
+          <a:xfrm>
+            <a:off x="731520" y="1097280"/>
+            <a:ext cx="2743200" cy="36576"/>
+          </a:xfrm>
+          <a:prstGeom prst="rect">
+            <a:avLst/>
+          </a:prstGeom>
+          <a:solidFill>
+            <a:srgbClr val="00D2FF"/>
+          </a:solidFill>
+          <a:ln>
+            <a:noFill/>
+          </a:ln>
+        </p:spPr>
+        <p:style>
+          <a:lnRef idx="1">
+            <a:schemeClr val="accent1"/>
+          </a:lnRef>
+          <a:fillRef idx="3">
+            <a:schemeClr val="accent1"/>
+          </a:fillRef>
+          <a:effectRef idx="2">
+            <a:schemeClr val="accent1"/>
+          </a:effectRef>
+          <a:fontRef idx="minor">
+            <a:schemeClr val="lt1"/>
+          </a:fontRef>
+        </p:style>
+        <p:txBody>
+          <a:bodyPr rtlCol="0" anchor="ctr"/>
+          <a:lstStyle/>
+          <a:p>
+            <a:pPr algn="ctr"/>
+          </a:p>
+        </p:txBody>
+      </p:sp>
+      <p:sp>
+        <p:nvSpPr>
+          <p:cNvPr id="4" name="TextBox 3"/>
+          <p:cNvSpPr txBox="1"/>
+          <p:nvPr/>
+        </p:nvSpPr>
+        <p:spPr>
+          <a:xfrm>
+            <a:off x="731520" y="1463040"/>
+            <a:ext cx="5029200" cy="457200"/>
+          </a:xfrm>
+          <a:prstGeom prst="rect">
+            <a:avLst/>
+          </a:prstGeom>
+          <a:noFill/>
+        </p:spPr>
+        <p:txBody>
+          <a:bodyPr wrap="square">
+            <a:spAutoFit/>
+          </a:bodyPr>
+          <a:lstStyle/>
+          <a:p>
+            <a:pPr algn="l">
+              <a:defRPr sz="2200" b="1">
+                <a:solidFill>
+                  <a:srgbClr val="00E676"/>
+                </a:solidFill>
+              </a:defRPr>
+            </a:pPr>
+            <a:r>
+              <a:t>Documentacao</a:t>
+            </a:r>
+          </a:p>
+        </p:txBody>
+      </p:sp>
+      <p:sp>
+        <p:nvSpPr>
+          <p:cNvPr id="5" name="TextBox 4"/>
+          <p:cNvSpPr txBox="1"/>
+          <p:nvPr/>
+        </p:nvSpPr>
+        <p:spPr>
+          <a:xfrm>
+            <a:off x="731520" y="1920240"/>
+            <a:ext cx="5029200" cy="2743200"/>
+          </a:xfrm>
+          <a:prstGeom prst="rect">
+            <a:avLst/>
+          </a:prstGeom>
+          <a:noFill/>
+        </p:spPr>
+        <p:txBody>
+          <a:bodyPr wrap="square">
+            <a:spAutoFit/>
+          </a:bodyPr>
+          <a:lstStyle/>
+          <a:p>
+            <a:pPr>
+              <a:spcAft>
+                <a:spcPts val="300"/>
+              </a:spcAft>
+              <a:defRPr sz="1600">
+                <a:solidFill>
+                  <a:srgbClr val="CCCCCC"/>
+                </a:solidFill>
+              </a:defRPr>
+            </a:pPr>
+            <a:r>
+              <a:t>LearnOpenGL  -  https://learnopengl.com/</a:t>
+            </a:r>
+          </a:p>
+          <a:p>
+            <a:pPr>
+              <a:spcAft>
+                <a:spcPts val="300"/>
+              </a:spcAft>
+              <a:defRPr sz="1600">
+                <a:solidFill>
+                  <a:srgbClr val="CCCCCC"/>
+                </a:solidFill>
+              </a:defRPr>
+            </a:pPr>
+            <a:r>
+              <a:t>OpenGL Docs  -  https://docs.gl/</a:t>
+            </a:r>
+          </a:p>
+          <a:p>
+            <a:pPr>
+              <a:spcAft>
+                <a:spcPts val="300"/>
+              </a:spcAft>
+              <a:defRPr sz="1600">
+                <a:solidFill>
+                  <a:srgbClr val="CCCCCC"/>
+                </a:solidFill>
+              </a:defRPr>
+            </a:pPr>
+            <a:r>
+              <a:t>GLM Docs  -  https://glm.g-truc.net/</a:t>
+            </a:r>
+          </a:p>
+          <a:p>
+            <a:pPr>
+              <a:spcAft>
+                <a:spcPts val="300"/>
+              </a:spcAft>
+              <a:defRPr sz="1600">
+                <a:solidFill>
+                  <a:srgbClr val="CCCCCC"/>
+                </a:solidFill>
+              </a:defRPr>
+            </a:pPr>
+            <a:r>
+              <a:t>ImGui Docs  -  github.com/ocornut/imgui</a:t>
+            </a:r>
+          </a:p>
+          <a:p>
+            <a:pPr>
+              <a:spcAft>
+                <a:spcPts val="300"/>
+              </a:spcAft>
+              <a:defRPr sz="1600">
+                <a:solidFill>
+                  <a:srgbClr val="CCCCCC"/>
+                </a:solidFill>
+              </a:defRPr>
+            </a:pPr>
+            <a:r>
+              <a:t>GLAD Generator  -  https://glad.dav1d.de/</a:t>
+            </a:r>
+          </a:p>
+        </p:txBody>
+      </p:sp>
+      <p:sp>
+        <p:nvSpPr>
+          <p:cNvPr id="6" name="TextBox 5"/>
+          <p:cNvSpPr txBox="1"/>
+          <p:nvPr/>
+        </p:nvSpPr>
+        <p:spPr>
+          <a:xfrm>
+            <a:off x="6400800" y="1463040"/>
+            <a:ext cx="5029200" cy="457200"/>
+          </a:xfrm>
+          <a:prstGeom prst="rect">
+            <a:avLst/>
+          </a:prstGeom>
+          <a:noFill/>
+        </p:spPr>
+        <p:txBody>
+          <a:bodyPr wrap="square">
+            <a:spAutoFit/>
+          </a:bodyPr>
+          <a:lstStyle/>
+          <a:p>
+            <a:pPr algn="l">
+              <a:defRPr sz="2200" b="1">
+                <a:solidFill>
+                  <a:srgbClr val="00E676"/>
+                </a:solidFill>
+              </a:defRPr>
+            </a:pPr>
+            <a:r>
+              <a:t>Assets</a:t>
+            </a:r>
+          </a:p>
+        </p:txBody>
+      </p:sp>
+      <p:sp>
+        <p:nvSpPr>
+          <p:cNvPr id="7" name="TextBox 6"/>
+          <p:cNvSpPr txBox="1"/>
+          <p:nvPr/>
+        </p:nvSpPr>
+        <p:spPr>
+          <a:xfrm>
+            <a:off x="6400800" y="1920240"/>
+            <a:ext cx="5029200" cy="2743200"/>
+          </a:xfrm>
+          <a:prstGeom prst="rect">
+            <a:avLst/>
+          </a:prstGeom>
+          <a:noFill/>
+        </p:spPr>
+        <p:txBody>
+          <a:bodyPr wrap="square">
+            <a:spAutoFit/>
+          </a:bodyPr>
+          <a:lstStyle/>
+          <a:p>
+            <a:pPr>
+              <a:spcAft>
+                <a:spcPts val="300"/>
+              </a:spcAft>
+              <a:defRPr sz="1600">
+                <a:solidFill>
+                  <a:srgbClr val="CCCCCC"/>
+                </a:solidFill>
+              </a:defRPr>
+            </a:pPr>
+            <a:r>
+              <a:t>Suzanne  -  Blender (开源, CC-BY)</a:t>
+            </a:r>
+          </a:p>
+          <a:p>
+            <a:pPr>
+              <a:spcAft>
+                <a:spcPts val="300"/>
+              </a:spcAft>
+              <a:defRPr sz="1600">
+                <a:solidFill>
+                  <a:srgbClr val="CCCCCC"/>
+                </a:solidFill>
+              </a:defRPr>
+            </a:pPr>
+            <a:r>
+              <a:t>Texturas  -  https://ambientcg.com/</a:t>
+            </a:r>
+          </a:p>
+          <a:p>
+            <a:pPr>
+              <a:spcAft>
+                <a:spcPts val="300"/>
+              </a:spcAft>
+              <a:defRPr sz="1600">
+                <a:solidFill>
+                  <a:srgbClr val="CCCCCC"/>
+                </a:solidFill>
+              </a:defRPr>
+            </a:pPr>
+            <a:r>
+              <a:t>Modelos  -  https://sketchfab.com/</a:t>
+            </a:r>
+          </a:p>
+          <a:p>
+            <a:pPr>
+              <a:spcAft>
+                <a:spcPts val="300"/>
+              </a:spcAft>
+              <a:defRPr sz="1600">
+                <a:solidFill>
+                  <a:srgbClr val="CCCCCC"/>
+                </a:solidFill>
+              </a:defRPr>
+            </a:pPr>
+            <a:r>
+              <a:t>      https://free3d.com/</a:t>
+            </a:r>
+          </a:p>
+        </p:txBody>
+      </p:sp>
+      <p:sp>
+        <p:nvSpPr>
+          <p:cNvPr id="8" name="TextBox 7"/>
+          <p:cNvSpPr txBox="1"/>
+          <p:nvPr/>
+        </p:nvSpPr>
+        <p:spPr>
+          <a:xfrm>
+            <a:off x="731520" y="4114800"/>
+            <a:ext cx="10698480" cy="457200"/>
+          </a:xfrm>
+          <a:prstGeom prst="rect">
+            <a:avLst/>
+          </a:prstGeom>
+          <a:noFill/>
+        </p:spPr>
+        <p:txBody>
+          <a:bodyPr wrap="square">
+            <a:spAutoFit/>
+          </a:bodyPr>
+          <a:lstStyle/>
+          <a:p>
+            <a:pPr algn="l">
+              <a:defRPr sz="2200" b="1">
+                <a:solidFill>
+                  <a:srgbClr val="00E676"/>
+                </a:solidFill>
+              </a:defRPr>
+            </a:pPr>
+            <a:r>
+              <a:t>Bibliografia do Curso</a:t>
+            </a:r>
+          </a:p>
+        </p:txBody>
+      </p:sp>
+      <p:sp>
+        <p:nvSpPr>
+          <p:cNvPr id="9" name="TextBox 8"/>
+          <p:cNvSpPr txBox="1"/>
+          <p:nvPr/>
+        </p:nvSpPr>
+        <p:spPr>
+          <a:xfrm>
+            <a:off x="731520" y="4572000"/>
+            <a:ext cx="10698480" cy="1828800"/>
+          </a:xfrm>
+          <a:prstGeom prst="rect">
+            <a:avLst/>
+          </a:prstGeom>
+          <a:noFill/>
+        </p:spPr>
+        <p:txBody>
+          <a:bodyPr wrap="square">
+            <a:spAutoFit/>
+          </a:bodyPr>
+          <a:lstStyle/>
+          <a:p>
+            <a:pPr>
+              <a:spcAft>
+                <a:spcPts val="400"/>
+              </a:spcAft>
+              <a:defRPr sz="1600">
+                <a:solidFill>
+                  <a:srgbClr val="CCCCCC"/>
+                </a:solidFill>
+              </a:defRPr>
+            </a:pPr>
+            <a:r>
+              <a:t>Material de aula: Computacao Grafica 2026/1 - Unisinos</a:t>
+            </a:r>
+          </a:p>
+          <a:p>
+            <a:pPr>
+              <a:spcAft>
+                <a:spcPts val="400"/>
+              </a:spcAft>
+              <a:defRPr sz="1600">
+                <a:solidFill>
+                  <a:srgbClr val="CCCCCC"/>
+                </a:solidFill>
+              </a:defRPr>
+            </a:pPr>
+            <a:r>
+              <a:t>CMake FetchContent  -  https://cmake.org/cmake/help/latest/module/FetchContent.html</a:t>
+            </a:r>
+          </a:p>
+        </p:txBody>
+      </p:sp>
+    </p:spTree>
+  </p:cSld>
+  <p:clrMapOvr>
+    <a:masterClrMapping/>
+  </p:clrMapOvr>
+</p:sld>
+</file>
+
+<file path=ppt/slides/slide13.xml><?xml version="1.0" encoding="utf-8"?>
+<p:sld xmlns:a="http://schemas.openxmlformats.org/drawingml/2006/main" xmlns:p="http://schemas.openxmlformats.org/presentationml/2006/main" xmlns:r="http://schemas.openxmlformats.org/officeDocument/2006/relationships">
+  <p:cSld>
+    <p:bg>
+      <p:bgPr>
+        <a:solidFill>
+          <a:srgbClr val="1A1A2E"/>
+        </a:solidFill>
+        <a:effectLst/>
+      </p:bgPr>
+    </p:bg>
+    <p:spTree>
+      <p:nvGrpSpPr>
+        <p:cNvPr id="1" name=""/>
+        <p:cNvGrpSpPr/>
+        <p:nvPr/>
+      </p:nvGrpSpPr>
+      <p:grpSpPr/>
+      <p:sp>
+        <p:nvSpPr>
+          <p:cNvPr id="2" name="Rectangle 1"/>
+          <p:cNvSpPr/>
+          <p:nvPr/>
+        </p:nvSpPr>
+        <p:spPr>
+          <a:xfrm>
+            <a:off x="914400" y="2926080"/>
+            <a:ext cx="10332720" cy="36576"/>
+          </a:xfrm>
+          <a:prstGeom prst="rect">
+            <a:avLst/>
+          </a:prstGeom>
+          <a:solidFill>
+            <a:srgbClr val="00D2FF"/>
+          </a:solidFill>
+          <a:ln>
+            <a:noFill/>
+          </a:ln>
+        </p:spPr>
+        <p:style>
+          <a:lnRef idx="1">
+            <a:schemeClr val="accent1"/>
+          </a:lnRef>
+          <a:fillRef idx="3">
+            <a:schemeClr val="accent1"/>
+          </a:fillRef>
+          <a:effectRef idx="2">
+            <a:schemeClr val="accent1"/>
+          </a:effectRef>
+          <a:fontRef idx="minor">
+            <a:schemeClr val="lt1"/>
+          </a:fontRef>
+        </p:style>
+        <p:txBody>
+          <a:bodyPr rtlCol="0" anchor="ctr"/>
+          <a:lstStyle/>
+          <a:p>
+            <a:pPr algn="ctr"/>
+          </a:p>
+        </p:txBody>
+      </p:sp>
+      <p:sp>
+        <p:nvSpPr>
+          <p:cNvPr id="3" name="TextBox 2"/>
+          <p:cNvSpPr txBox="1"/>
+          <p:nvPr/>
+        </p:nvSpPr>
+        <p:spPr>
+          <a:xfrm>
+            <a:off x="914400" y="1828800"/>
+            <a:ext cx="10332720" cy="1371600"/>
+          </a:xfrm>
+          <a:prstGeom prst="rect">
+            <a:avLst/>
+          </a:prstGeom>
+          <a:noFill/>
+        </p:spPr>
+        <p:txBody>
+          <a:bodyPr wrap="square">
+            <a:spAutoFit/>
+          </a:bodyPr>
+          <a:lstStyle/>
+          <a:p>
+            <a:pPr algn="ctr">
+              <a:defRPr sz="6000" b="1">
+                <a:solidFill>
+                  <a:srgbClr val="00D2FF"/>
+                </a:solidFill>
+              </a:defRPr>
+            </a:pPr>
+            <a:r>
+              <a:t>Obrigado!</a:t>
+            </a:r>
+          </a:p>
+        </p:txBody>
+      </p:sp>
+      <p:sp>
+        <p:nvSpPr>
+          <p:cNvPr id="4" name="TextBox 3"/>
+          <p:cNvSpPr txBox="1"/>
+          <p:nvPr/>
+        </p:nvSpPr>
+        <p:spPr>
+          <a:xfrm>
+            <a:off x="914400" y="3200400"/>
+            <a:ext cx="10332720" cy="731520"/>
+          </a:xfrm>
+          <a:prstGeom prst="rect">
+            <a:avLst/>
+          </a:prstGeom>
+          <a:noFill/>
+        </p:spPr>
+        <p:txBody>
+          <a:bodyPr wrap="square">
+            <a:spAutoFit/>
+          </a:bodyPr>
+          <a:lstStyle/>
+          <a:p>
+            <a:pPr algn="ctr">
+              <a:defRPr sz="2200" b="0">
+                <a:solidFill>
+                  <a:srgbClr val="CCCCCC"/>
+                </a:solidFill>
+              </a:defRPr>
+            </a:pPr>
+            <a:r>
+              <a:t>github.com/amarqs182/CGCCHibrido</a:t>
+            </a:r>
+          </a:p>
+        </p:txBody>
+      </p:sp>
+      <p:sp>
+        <p:nvSpPr>
+          <p:cNvPr id="5" name="TextBox 4"/>
+          <p:cNvSpPr txBox="1"/>
+          <p:nvPr/>
+        </p:nvSpPr>
+        <p:spPr>
+          <a:xfrm>
+            <a:off x="914400" y="4114800"/>
+            <a:ext cx="10332720" cy="914400"/>
+          </a:xfrm>
+          <a:prstGeom prst="rect">
+            <a:avLst/>
+          </a:prstGeom>
+          <a:noFill/>
+        </p:spPr>
+        <p:txBody>
+          <a:bodyPr wrap="square">
+            <a:spAutoFit/>
+          </a:bodyPr>
+          <a:lstStyle/>
+          <a:p>
+            <a:pPr algn="ctr">
+              <a:defRPr sz="2800" b="0">
+                <a:solidFill>
+                  <a:srgbClr val="FFFFFF"/>
+                </a:solidFill>
+              </a:defRPr>
+            </a:pPr>
+            <a:r>
+              <a:t>Perguntas?</a:t>
             </a:r>
           </a:p>
         </p:txBody>
@@ -3321,7 +5137,7 @@
         </p:nvSpPr>
         <p:spPr>
           <a:xfrm>
-            <a:off x="731520" y="457200"/>
+            <a:off x="731520" y="365760"/>
             <a:ext cx="10698480" cy="731520"/>
           </a:xfrm>
           <a:prstGeom prst="rect">
@@ -3343,7 +5159,7 @@
               </a:defRPr>
             </a:pPr>
             <a:r>
-              <a:t>Objetivo</a:t>
+              <a:t>O que e o Diorama?</a:t>
             </a:r>
           </a:p>
         </p:txBody>
@@ -3356,8 +5172,8 @@
         </p:nvSpPr>
         <p:spPr>
           <a:xfrm>
-            <a:off x="731520" y="1188720"/>
-            <a:ext cx="2743200" cy="45720"/>
+            <a:off x="731520" y="1097280"/>
+            <a:ext cx="3657600" cy="36576"/>
           </a:xfrm>
           <a:prstGeom prst="rect">
             <a:avLst/>
@@ -3399,8 +5215,8 @@
         </p:nvSpPr>
         <p:spPr>
           <a:xfrm>
-            <a:off x="731520" y="1645920"/>
-            <a:ext cx="10698480" cy="4572000"/>
+            <a:off x="731520" y="1463040"/>
+            <a:ext cx="10698480" cy="5029200"/>
           </a:xfrm>
           <a:prstGeom prst="rect">
             <a:avLst/>
@@ -3415,7 +5231,7 @@
           <a:p>
             <a:pPr>
               <a:spcAft>
-                <a:spcPts val="800"/>
+                <a:spcPts val="400"/>
               </a:spcAft>
               <a:defRPr sz="2000">
                 <a:solidFill>
@@ -3424,13 +5240,13 @@
               </a:defRPr>
             </a:pPr>
             <a:r>
-              <a:t>Integrar todos os topicos do semestre em uma unica aplicacao</a:t>
-            </a:r>
-          </a:p>
-          <a:p>
-            <a:pPr>
-              <a:spcAft>
-                <a:spcPts val="800"/>
+              <a:t>Um visualizador 3D que integra TODOS os topicos do semestre:</a:t>
+            </a:r>
+          </a:p>
+          <a:p>
+            <a:pPr>
+              <a:spcAft>
+                <a:spcPts val="400"/>
               </a:spcAft>
               <a:defRPr sz="2000">
                 <a:solidFill>
@@ -3438,14 +5254,11 @@
                 </a:solidFill>
               </a:defRPr>
             </a:pPr>
-            <a:r>
-              <a:t>Demonstrar dominio do pipeline grafico completo</a:t>
-            </a:r>
-          </a:p>
-          <a:p>
-            <a:pPr>
-              <a:spcAft>
-                <a:spcPts val="800"/>
+          </a:p>
+          <a:p>
+            <a:pPr>
+              <a:spcAft>
+                <a:spcPts val="400"/>
               </a:spcAft>
               <a:defRPr sz="2000">
                 <a:solidFill>
@@ -3454,13 +5267,13 @@
               </a:defRPr>
             </a:pPr>
             <a:r>
-              <a:t>Visualizador funcional com interacao em tempo real</a:t>
-            </a:r>
-          </a:p>
-          <a:p>
-            <a:pPr>
-              <a:spcAft>
-                <a:spcPts val="800"/>
+              <a:t>   OpenGL 4.x       - Renderizacao grafica moderna</a:t>
+            </a:r>
+          </a:p>
+          <a:p>
+            <a:pPr>
+              <a:spcAft>
+                <a:spcPts val="400"/>
               </a:spcAft>
               <a:defRPr sz="2000">
                 <a:solidFill>
@@ -3468,11 +5281,14 @@
                 </a:solidFill>
               </a:defRPr>
             </a:pPr>
-          </a:p>
-          <a:p>
-            <a:pPr>
-              <a:spcAft>
-                <a:spcPts val="800"/>
+            <a:r>
+              <a:t>   Camera FPS        - Navegacao livre pela cena</a:t>
+            </a:r>
+          </a:p>
+          <a:p>
+            <a:pPr>
+              <a:spcAft>
+                <a:spcPts val="400"/>
               </a:spcAft>
               <a:defRPr sz="2000">
                 <a:solidFill>
@@ -3481,13 +5297,13 @@
               </a:defRPr>
             </a:pPr>
             <a:r>
-              <a:t>Topicos integrados:</a:t>
-            </a:r>
-          </a:p>
-          <a:p>
-            <a:pPr>
-              <a:spcAft>
-                <a:spcPts val="800"/>
+              <a:t>   Iluminacao Phong  - 3 fontes de luz pontuais</a:t>
+            </a:r>
+          </a:p>
+          <a:p>
+            <a:pPr>
+              <a:spcAft>
+                <a:spcPts val="400"/>
               </a:spcAft>
               <a:defRPr sz="2000">
                 <a:solidFill>
@@ -3496,13 +5312,13 @@
               </a:defRPr>
             </a:pPr>
             <a:r>
-              <a:t>   OpenGL 4.x  |  Camera FPS  |  Iluminacao Phong</a:t>
-            </a:r>
-          </a:p>
-          <a:p>
-            <a:pPr>
-              <a:spcAft>
-                <a:spcPts val="800"/>
+              <a:t>   Curvas de Bezier  - Animacao de trajetorias</a:t>
+            </a:r>
+          </a:p>
+          <a:p>
+            <a:pPr>
+              <a:spcAft>
+                <a:spcPts val="400"/>
               </a:spcAft>
               <a:defRPr sz="2000">
                 <a:solidFill>
@@ -3511,13 +5327,13 @@
               </a:defRPr>
             </a:pPr>
             <a:r>
-              <a:t>   Curvas de Bezier  |  Texturas  |  Carregamento .obj</a:t>
-            </a:r>
-          </a:p>
-          <a:p>
-            <a:pPr>
-              <a:spcAft>
-                <a:spcPts val="800"/>
+              <a:t>   Texturas          - Mapeamento de imagens nos objetos</a:t>
+            </a:r>
+          </a:p>
+          <a:p>
+            <a:pPr>
+              <a:spcAft>
+                <a:spcPts val="400"/>
               </a:spcAft>
               <a:defRPr sz="2000">
                 <a:solidFill>
@@ -3526,7 +5342,64 @@
               </a:defRPr>
             </a:pPr>
             <a:r>
-              <a:t>   Interface ImGui  |  Materiais .mtl</a:t>
+              <a:t>   Modelos .obj      - Carregamento de malhas 3D</a:t>
+            </a:r>
+          </a:p>
+          <a:p>
+            <a:pPr>
+              <a:spcAft>
+                <a:spcPts val="400"/>
+              </a:spcAft>
+              <a:defRPr sz="2000">
+                <a:solidFill>
+                  <a:srgbClr val="FFFFFF"/>
+                </a:solidFill>
+              </a:defRPr>
+            </a:pPr>
+            <a:r>
+              <a:t>   Materiais .mtl     - Propriedades opticas dos objetos</a:t>
+            </a:r>
+          </a:p>
+          <a:p>
+            <a:pPr>
+              <a:spcAft>
+                <a:spcPts val="400"/>
+              </a:spcAft>
+              <a:defRPr sz="2000">
+                <a:solidFill>
+                  <a:srgbClr val="FFFFFF"/>
+                </a:solidFill>
+              </a:defRPr>
+            </a:pPr>
+            <a:r>
+              <a:t>   ImGui             - Interface grafica para controle em tempo real</a:t>
+            </a:r>
+          </a:p>
+          <a:p>
+            <a:pPr>
+              <a:spcAft>
+                <a:spcPts val="400"/>
+              </a:spcAft>
+              <a:defRPr sz="2000">
+                <a:solidFill>
+                  <a:srgbClr val="FFFFFF"/>
+                </a:solidFill>
+              </a:defRPr>
+            </a:pPr>
+          </a:p>
+          <a:p>
+            <a:pPr>
+              <a:spcAft>
+                <a:spcPts val="400"/>
+              </a:spcAft>
+              <a:defRPr sz="2000">
+                <a:solidFill>
+                  <a:srgbClr val="FFFFFF"/>
+                </a:solidFill>
+              </a:defRPr>
+            </a:pPr>
+            <a:r>
+              <a:t>Tudo em uma unica cena (diorama) com interacao completa</a:t>
             </a:r>
           </a:p>
         </p:txBody>
@@ -3565,7 +5438,7 @@
         </p:nvSpPr>
         <p:spPr>
           <a:xfrm>
-            <a:off x="731520" y="457200"/>
+            <a:off x="731520" y="365760"/>
             <a:ext cx="10698480" cy="731520"/>
           </a:xfrm>
           <a:prstGeom prst="rect">
@@ -3587,7 +5460,7 @@
               </a:defRPr>
             </a:pPr>
             <a:r>
-              <a:t>Arquitetura</a:t>
+              <a:t>Arquitetura do Sistema</a:t>
             </a:r>
           </a:p>
         </p:txBody>
@@ -3600,8 +5473,8 @@
         </p:nvSpPr>
         <p:spPr>
           <a:xfrm>
-            <a:off x="731520" y="1188720"/>
-            <a:ext cx="2743200" cy="45720"/>
+            <a:off x="731520" y="1097280"/>
+            <a:ext cx="3657600" cy="36576"/>
           </a:xfrm>
           <a:prstGeom prst="rect">
             <a:avLst/>
@@ -3643,8 +5516,8 @@
         </p:nvSpPr>
         <p:spPr>
           <a:xfrm>
-            <a:off x="731520" y="1645920"/>
-            <a:ext cx="5029200" cy="4572000"/>
+            <a:off x="731520" y="1463040"/>
+            <a:ext cx="5029200" cy="457200"/>
           </a:xfrm>
           <a:prstGeom prst="rect">
             <a:avLst/>
@@ -3657,78 +5530,15 @@
           </a:bodyPr>
           <a:lstStyle/>
           <a:p>
-            <a:pPr>
-              <a:spcAft>
-                <a:spcPts val="800"/>
-              </a:spcAft>
-              <a:defRPr sz="1800">
-                <a:solidFill>
-                  <a:srgbClr val="FFFFFF"/>
-                </a:solidFill>
-              </a:defRPr>
-            </a:pPr>
-            <a:r>
-              <a:t>MainDiorama.cpp - Aplicacao principal</a:t>
-            </a:r>
-          </a:p>
-          <a:p>
-            <a:pPr>
-              <a:spcAft>
-                <a:spcPts val="800"/>
-              </a:spcAft>
-              <a:defRPr sz="1800">
-                <a:solidFill>
-                  <a:srgbClr val="FFFFFF"/>
-                </a:solidFill>
-              </a:defRPr>
-            </a:pPr>
-            <a:r>
-              <a:t>Camera.cpp - Camera FPS (WASD + mouse)</a:t>
-            </a:r>
-          </a:p>
-          <a:p>
-            <a:pPr>
-              <a:spcAft>
-                <a:spcPts val="800"/>
-              </a:spcAft>
-              <a:defRPr sz="1800">
-                <a:solidFill>
-                  <a:srgbClr val="FFFFFF"/>
-                </a:solidFill>
-              </a:defRPr>
-            </a:pPr>
-            <a:r>
-              <a:t>ObjParser.cpp - Parser .obj/.mtl</a:t>
-            </a:r>
-          </a:p>
-          <a:p>
-            <a:pPr>
-              <a:spcAft>
-                <a:spcPts val="800"/>
-              </a:spcAft>
-              <a:defRPr sz="1800">
-                <a:solidFill>
-                  <a:srgbClr val="FFFFFF"/>
-                </a:solidFill>
-              </a:defRPr>
-            </a:pPr>
-            <a:r>
-              <a:t>Trajectory.cpp - Curvas de Bezier</a:t>
-            </a:r>
-          </a:p>
-          <a:p>
-            <a:pPr>
-              <a:spcAft>
-                <a:spcPts val="800"/>
-              </a:spcAft>
-              <a:defRPr sz="1800">
-                <a:solidFill>
-                  <a:srgbClr val="FFFFFF"/>
-                </a:solidFill>
-              </a:defRPr>
-            </a:pPr>
-            <a:r>
-              <a:t>SceneParser.cpp - Leitura de cena JSON</a:t>
+            <a:pPr algn="l">
+              <a:defRPr sz="2200" b="1">
+                <a:solidFill>
+                  <a:srgbClr val="00E676"/>
+                </a:solidFill>
+              </a:defRPr>
+            </a:pPr>
+            <a:r>
+              <a:t>Modulos Principais</a:t>
             </a:r>
           </a:p>
         </p:txBody>
@@ -3741,8 +5551,8 @@
         </p:nvSpPr>
         <p:spPr>
           <a:xfrm>
-            <a:off x="6400800" y="1645920"/>
-            <a:ext cx="5029200" cy="4572000"/>
+            <a:off x="731520" y="1920240"/>
+            <a:ext cx="5029200" cy="4114800"/>
           </a:xfrm>
           <a:prstGeom prst="rect">
             <a:avLst/>
@@ -3757,91 +5567,428 @@
           <a:p>
             <a:pPr>
               <a:spcAft>
-                <a:spcPts val="800"/>
-              </a:spcAft>
-              <a:defRPr sz="1800">
+                <a:spcPts val="300"/>
+              </a:spcAft>
+              <a:defRPr sz="1600">
+                <a:solidFill>
+                  <a:srgbClr val="FFFFFF"/>
+                </a:solidFill>
+              </a:defRPr>
+            </a:pPr>
+            <a:r>
+              <a:t>MainDiorama.cpp  -  Orquestrador central</a:t>
+            </a:r>
+          </a:p>
+          <a:p>
+            <a:pPr>
+              <a:spcAft>
+                <a:spcPts val="300"/>
+              </a:spcAft>
+              <a:defRPr sz="1600">
+                <a:solidFill>
+                  <a:srgbClr val="FFFFFF"/>
+                </a:solidFill>
+              </a:defRPr>
+            </a:pPr>
+            <a:r>
+              <a:t>     Setup da cena, shaders, render loop</a:t>
+            </a:r>
+          </a:p>
+          <a:p>
+            <a:pPr>
+              <a:spcAft>
+                <a:spcPts val="300"/>
+              </a:spcAft>
+              <a:defRPr sz="1600">
+                <a:solidFill>
+                  <a:srgbClr val="FFFFFF"/>
+                </a:solidFill>
+              </a:defRPr>
+            </a:pPr>
+            <a:r>
+              <a:t>     Integracao com ImGui</a:t>
+            </a:r>
+          </a:p>
+          <a:p>
+            <a:pPr>
+              <a:spcAft>
+                <a:spcPts val="300"/>
+              </a:spcAft>
+              <a:defRPr sz="1600">
+                <a:solidFill>
+                  <a:srgbClr val="FFFFFF"/>
+                </a:solidFill>
+              </a:defRPr>
+            </a:pPr>
+          </a:p>
+          <a:p>
+            <a:pPr>
+              <a:spcAft>
+                <a:spcPts val="300"/>
+              </a:spcAft>
+              <a:defRPr sz="1600">
+                <a:solidFill>
+                  <a:srgbClr val="FFFFFF"/>
+                </a:solidFill>
+              </a:defRPr>
+            </a:pPr>
+            <a:r>
+              <a:t>Camera.cpp  -  Camera FPS</a:t>
+            </a:r>
+          </a:p>
+          <a:p>
+            <a:pPr>
+              <a:spcAft>
+                <a:spcPts val="300"/>
+              </a:spcAft>
+              <a:defRPr sz="1600">
+                <a:solidFill>
+                  <a:srgbClr val="FFFFFF"/>
+                </a:solidFill>
+              </a:defRPr>
+            </a:pPr>
+            <a:r>
+              <a:t>     Movimento livre + mouse look</a:t>
+            </a:r>
+          </a:p>
+          <a:p>
+            <a:pPr>
+              <a:spcAft>
+                <a:spcPts val="300"/>
+              </a:spcAft>
+              <a:defRPr sz="1600">
+                <a:solidFill>
+                  <a:srgbClr val="FFFFFF"/>
+                </a:solidFill>
+              </a:defRPr>
+            </a:pPr>
+          </a:p>
+          <a:p>
+            <a:pPr>
+              <a:spcAft>
+                <a:spcPts val="300"/>
+              </a:spcAft>
+              <a:defRPr sz="1600">
+                <a:solidFill>
+                  <a:srgbClr val="FFFFFF"/>
+                </a:solidFill>
+              </a:defRPr>
+            </a:pPr>
+            <a:r>
+              <a:t>ObjParser.cpp  -  Parser de modelos</a:t>
+            </a:r>
+          </a:p>
+          <a:p>
+            <a:pPr>
+              <a:spcAft>
+                <a:spcPts val="300"/>
+              </a:spcAft>
+              <a:defRPr sz="1600">
+                <a:solidFill>
+                  <a:srgbClr val="FFFFFF"/>
+                </a:solidFill>
+              </a:defRPr>
+            </a:pPr>
+            <a:r>
+              <a:t>     Leitura .obj + .mtl + texturas</a:t>
+            </a:r>
+          </a:p>
+          <a:p>
+            <a:pPr>
+              <a:spcAft>
+                <a:spcPts val="300"/>
+              </a:spcAft>
+              <a:defRPr sz="1600">
+                <a:solidFill>
+                  <a:srgbClr val="FFFFFF"/>
+                </a:solidFill>
+              </a:defRPr>
+            </a:pPr>
+          </a:p>
+          <a:p>
+            <a:pPr>
+              <a:spcAft>
+                <a:spcPts val="300"/>
+              </a:spcAft>
+              <a:defRPr sz="1600">
+                <a:solidFill>
+                  <a:srgbClr val="FFFFFF"/>
+                </a:solidFill>
+              </a:defRPr>
+            </a:pPr>
+            <a:r>
+              <a:t>Trajectory.cpp  -  Curvas de Bezier</a:t>
+            </a:r>
+          </a:p>
+          <a:p>
+            <a:pPr>
+              <a:spcAft>
+                <a:spcPts val="300"/>
+              </a:spcAft>
+              <a:defRPr sz="1600">
+                <a:solidFill>
+                  <a:srgbClr val="FFFFFF"/>
+                </a:solidFill>
+              </a:defRPr>
+            </a:pPr>
+            <a:r>
+              <a:t>     Interpolacao e animacao</a:t>
+            </a:r>
+          </a:p>
+        </p:txBody>
+      </p:sp>
+      <p:sp>
+        <p:nvSpPr>
+          <p:cNvPr id="6" name="TextBox 5"/>
+          <p:cNvSpPr txBox="1"/>
+          <p:nvPr/>
+        </p:nvSpPr>
+        <p:spPr>
+          <a:xfrm>
+            <a:off x="6400800" y="1463040"/>
+            <a:ext cx="5029200" cy="457200"/>
+          </a:xfrm>
+          <a:prstGeom prst="rect">
+            <a:avLst/>
+          </a:prstGeom>
+          <a:noFill/>
+        </p:spPr>
+        <p:txBody>
+          <a:bodyPr wrap="square">
+            <a:spAutoFit/>
+          </a:bodyPr>
+          <a:lstStyle/>
+          <a:p>
+            <a:pPr algn="l">
+              <a:defRPr sz="2200" b="1">
+                <a:solidFill>
+                  <a:srgbClr val="00E676"/>
+                </a:solidFill>
+              </a:defRPr>
+            </a:pPr>
+            <a:r>
+              <a:t>Dependencias Externas</a:t>
+            </a:r>
+          </a:p>
+        </p:txBody>
+      </p:sp>
+      <p:sp>
+        <p:nvSpPr>
+          <p:cNvPr id="7" name="TextBox 6"/>
+          <p:cNvSpPr txBox="1"/>
+          <p:nvPr/>
+        </p:nvSpPr>
+        <p:spPr>
+          <a:xfrm>
+            <a:off x="6400800" y="1920240"/>
+            <a:ext cx="5029200" cy="4114800"/>
+          </a:xfrm>
+          <a:prstGeom prst="rect">
+            <a:avLst/>
+          </a:prstGeom>
+          <a:noFill/>
+        </p:spPr>
+        <p:txBody>
+          <a:bodyPr wrap="square">
+            <a:spAutoFit/>
+          </a:bodyPr>
+          <a:lstStyle/>
+          <a:p>
+            <a:pPr>
+              <a:spcAft>
+                <a:spcPts val="300"/>
+              </a:spcAft>
+              <a:defRPr sz="1600">
                 <a:solidFill>
                   <a:srgbClr val="CCCCCC"/>
                 </a:solidFill>
               </a:defRPr>
             </a:pPr>
             <a:r>
-              <a:t>Dependencias (FetchContent):</a:t>
-            </a:r>
-          </a:p>
-          <a:p>
-            <a:pPr>
-              <a:spcAft>
-                <a:spcPts val="800"/>
-              </a:spcAft>
-              <a:defRPr sz="1800">
+              <a:t>GLFW 3.4  -  Janela e input</a:t>
+            </a:r>
+          </a:p>
+          <a:p>
+            <a:pPr>
+              <a:spcAft>
+                <a:spcPts val="300"/>
+              </a:spcAft>
+              <a:defRPr sz="1600">
                 <a:solidFill>
                   <a:srgbClr val="CCCCCC"/>
                 </a:solidFill>
               </a:defRPr>
             </a:pPr>
             <a:r>
-              <a:t>   GLFW 3.4 - Janela e input</a:t>
-            </a:r>
-          </a:p>
-          <a:p>
-            <a:pPr>
-              <a:spcAft>
-                <a:spcPts val="800"/>
-              </a:spcAft>
-              <a:defRPr sz="1800">
+              <a:t>     Criacao de janela, callbacks de teclado/mouse</a:t>
+            </a:r>
+          </a:p>
+          <a:p>
+            <a:pPr>
+              <a:spcAft>
+                <a:spcPts val="300"/>
+              </a:spcAft>
+              <a:defRPr sz="1600">
                 <a:solidFill>
                   <a:srgbClr val="CCCCCC"/>
                 </a:solidFill>
               </a:defRPr>
             </a:pPr>
-            <a:r>
-              <a:t>   GLM - Matrizes e math</a:t>
-            </a:r>
-          </a:p>
-          <a:p>
-            <a:pPr>
-              <a:spcAft>
-                <a:spcPts val="800"/>
-              </a:spcAft>
-              <a:defRPr sz="1800">
+          </a:p>
+          <a:p>
+            <a:pPr>
+              <a:spcAft>
+                <a:spcPts val="300"/>
+              </a:spcAft>
+              <a:defRPr sz="1600">
                 <a:solidFill>
                   <a:srgbClr val="CCCCCC"/>
                 </a:solidFill>
               </a:defRPr>
             </a:pPr>
             <a:r>
-              <a:t>   stb_image - Carregamento de imagens</a:t>
-            </a:r>
-          </a:p>
-          <a:p>
-            <a:pPr>
-              <a:spcAft>
-                <a:spcPts val="800"/>
-              </a:spcAft>
-              <a:defRPr sz="1800">
+              <a:t>GLM  -  Matematica para graphics</a:t>
+            </a:r>
+          </a:p>
+          <a:p>
+            <a:pPr>
+              <a:spcAft>
+                <a:spcPts val="300"/>
+              </a:spcAft>
+              <a:defRPr sz="1600">
                 <a:solidFill>
                   <a:srgbClr val="CCCCCC"/>
                 </a:solidFill>
               </a:defRPr>
             </a:pPr>
             <a:r>
-              <a:t>   ImGui 1.91.8 - Interface grafica</a:t>
-            </a:r>
-          </a:p>
-          <a:p>
-            <a:pPr>
-              <a:spcAft>
-                <a:spcPts val="800"/>
-              </a:spcAft>
-              <a:defRPr sz="1800">
+              <a:t>     Matrizes, vetores, transformacoes</a:t>
+            </a:r>
+          </a:p>
+          <a:p>
+            <a:pPr>
+              <a:spcAft>
+                <a:spcPts val="300"/>
+              </a:spcAft>
+              <a:defRPr sz="1600">
                 <a:solidFill>
                   <a:srgbClr val="CCCCCC"/>
                 </a:solidFill>
               </a:defRPr>
             </a:pPr>
-            <a:r>
-              <a:t>   GLAD - OpenGL loader</a:t>
+          </a:p>
+          <a:p>
+            <a:pPr>
+              <a:spcAft>
+                <a:spcPts val="300"/>
+              </a:spcAft>
+              <a:defRPr sz="1600">
+                <a:solidFill>
+                  <a:srgbClr val="CCCCCC"/>
+                </a:solidFill>
+              </a:defRPr>
+            </a:pPr>
+            <a:r>
+              <a:t>stb_image  -  Carregamento de imagens</a:t>
+            </a:r>
+          </a:p>
+          <a:p>
+            <a:pPr>
+              <a:spcAft>
+                <a:spcPts val="300"/>
+              </a:spcAft>
+              <a:defRPr sz="1600">
+                <a:solidFill>
+                  <a:srgbClr val="CCCCCC"/>
+                </a:solidFill>
+              </a:defRPr>
+            </a:pPr>
+            <a:r>
+              <a:t>     Leitura de PNG/JPG para texturas</a:t>
+            </a:r>
+          </a:p>
+          <a:p>
+            <a:pPr>
+              <a:spcAft>
+                <a:spcPts val="300"/>
+              </a:spcAft>
+              <a:defRPr sz="1600">
+                <a:solidFill>
+                  <a:srgbClr val="CCCCCC"/>
+                </a:solidFill>
+              </a:defRPr>
+            </a:pPr>
+          </a:p>
+          <a:p>
+            <a:pPr>
+              <a:spcAft>
+                <a:spcPts val="300"/>
+              </a:spcAft>
+              <a:defRPr sz="1600">
+                <a:solidFill>
+                  <a:srgbClr val="CCCCCC"/>
+                </a:solidFill>
+              </a:defRPr>
+            </a:pPr>
+            <a:r>
+              <a:t>ImGui 1.91.8  -  Interface grafica</a:t>
+            </a:r>
+          </a:p>
+          <a:p>
+            <a:pPr>
+              <a:spcAft>
+                <a:spcPts val="300"/>
+              </a:spcAft>
+              <a:defRPr sz="1600">
+                <a:solidFill>
+                  <a:srgbClr val="CCCCCC"/>
+                </a:solidFill>
+              </a:defRPr>
+            </a:pPr>
+            <a:r>
+              <a:t>     Paineis de controle em tempo real</a:t>
+            </a:r>
+          </a:p>
+          <a:p>
+            <a:pPr>
+              <a:spcAft>
+                <a:spcPts val="300"/>
+              </a:spcAft>
+              <a:defRPr sz="1600">
+                <a:solidFill>
+                  <a:srgbClr val="CCCCCC"/>
+                </a:solidFill>
+              </a:defRPr>
+            </a:pPr>
+          </a:p>
+          <a:p>
+            <a:pPr>
+              <a:spcAft>
+                <a:spcPts val="300"/>
+              </a:spcAft>
+              <a:defRPr sz="1600">
+                <a:solidFill>
+                  <a:srgbClr val="CCCCCC"/>
+                </a:solidFill>
+              </a:defRPr>
+            </a:pPr>
+            <a:r>
+              <a:t>GLAD  -  OpenGL loader</a:t>
+            </a:r>
+          </a:p>
+          <a:p>
+            <a:pPr>
+              <a:spcAft>
+                <a:spcPts val="300"/>
+              </a:spcAft>
+              <a:defRPr sz="1600">
+                <a:solidFill>
+                  <a:srgbClr val="CCCCCC"/>
+                </a:solidFill>
+              </a:defRPr>
+            </a:pPr>
+            <a:r>
+              <a:t>     Carregamento de funcoes OpenGL</a:t>
             </a:r>
           </a:p>
         </p:txBody>
@@ -3880,7 +6027,7 @@
         </p:nvSpPr>
         <p:spPr>
           <a:xfrm>
-            <a:off x="731520" y="457200"/>
+            <a:off x="731520" y="365760"/>
             <a:ext cx="10698480" cy="731520"/>
           </a:xfrm>
           <a:prstGeom prst="rect">
@@ -3902,7 +6049,7 @@
               </a:defRPr>
             </a:pPr>
             <a:r>
-              <a:t>Cena do Diorama</a:t>
+              <a:t>A Cena do Diorama</a:t>
             </a:r>
           </a:p>
         </p:txBody>
@@ -3915,8 +6062,8 @@
         </p:nvSpPr>
         <p:spPr>
           <a:xfrm>
-            <a:off x="731520" y="1188720"/>
-            <a:ext cx="2743200" cy="45720"/>
+            <a:off x="731520" y="1097280"/>
+            <a:ext cx="3657600" cy="36576"/>
           </a:xfrm>
           <a:prstGeom prst="rect">
             <a:avLst/>
@@ -3958,8 +6105,8 @@
         </p:nvSpPr>
         <p:spPr>
           <a:xfrm>
-            <a:off x="731520" y="1645920"/>
-            <a:ext cx="5029200" cy="4572000"/>
+            <a:off x="731520" y="1463040"/>
+            <a:ext cx="5029200" cy="457200"/>
           </a:xfrm>
           <a:prstGeom prst="rect">
             <a:avLst/>
@@ -3972,93 +6119,15 @@
           </a:bodyPr>
           <a:lstStyle/>
           <a:p>
-            <a:pPr>
-              <a:spcAft>
-                <a:spcPts val="800"/>
-              </a:spcAft>
-              <a:defRPr sz="1800">
-                <a:solidFill>
-                  <a:srgbClr val="FFFFFF"/>
-                </a:solidFill>
-              </a:defRPr>
-            </a:pPr>
-            <a:r>
-              <a:t>5 Objetos:</a:t>
-            </a:r>
-          </a:p>
-          <a:p>
-            <a:pPr>
-              <a:spcAft>
-                <a:spcPts val="800"/>
-              </a:spcAft>
-              <a:defRPr sz="1800">
-                <a:solidFill>
-                  <a:srgbClr val="FFFFFF"/>
-                </a:solidFill>
-              </a:defRPr>
-            </a:pPr>
-            <a:r>
-              <a:t>   Cubo Principal (vermelho)</a:t>
-            </a:r>
-          </a:p>
-          <a:p>
-            <a:pPr>
-              <a:spcAft>
-                <a:spcPts val="800"/>
-              </a:spcAft>
-              <a:defRPr sz="1800">
-                <a:solidFill>
-                  <a:srgbClr val="FFFFFF"/>
-                </a:solidFill>
-              </a:defRPr>
-            </a:pPr>
-            <a:r>
-              <a:t>   Esfera Texturizada (pixelWall)</a:t>
-            </a:r>
-          </a:p>
-          <a:p>
-            <a:pPr>
-              <a:spcAft>
-                <a:spcPts val="800"/>
-              </a:spcAft>
-              <a:defRPr sz="1800">
-                <a:solidFill>
-                  <a:srgbClr val="FFFFFF"/>
-                </a:solidFill>
-              </a:defRPr>
-            </a:pPr>
-            <a:r>
-              <a:t>   Piramide Azul</a:t>
-            </a:r>
-          </a:p>
-          <a:p>
-            <a:pPr>
-              <a:spcAft>
-                <a:spcPts val="800"/>
-              </a:spcAft>
-              <a:defRPr sz="1800">
-                <a:solidFill>
-                  <a:srgbClr val="FFFFFF"/>
-                </a:solidFill>
-              </a:defRPr>
-            </a:pPr>
-            <a:r>
-              <a:t>   Chao (cinza)</a:t>
-            </a:r>
-          </a:p>
-          <a:p>
-            <a:pPr>
-              <a:spcAft>
-                <a:spcPts val="800"/>
-              </a:spcAft>
-              <a:defRPr sz="1800">
-                <a:solidFill>
-                  <a:srgbClr val="FFFFFF"/>
-                </a:solidFill>
-              </a:defRPr>
-            </a:pPr>
-            <a:r>
-              <a:t>   Suzanne - modelo .obj (macaco)</a:t>
+            <a:pPr algn="l">
+              <a:defRPr sz="2200" b="1">
+                <a:solidFill>
+                  <a:srgbClr val="00E676"/>
+                </a:solidFill>
+              </a:defRPr>
+            </a:pPr>
+            <a:r>
+              <a:t>5 Objetos 3D</a:t>
             </a:r>
           </a:p>
         </p:txBody>
@@ -4071,8 +6140,8 @@
         </p:nvSpPr>
         <p:spPr>
           <a:xfrm>
-            <a:off x="6400800" y="1645920"/>
-            <a:ext cx="5029200" cy="4572000"/>
+            <a:off x="731520" y="1920240"/>
+            <a:ext cx="5029200" cy="4114800"/>
           </a:xfrm>
           <a:prstGeom prst="rect">
             <a:avLst/>
@@ -4087,88 +6156,443 @@
           <a:p>
             <a:pPr>
               <a:spcAft>
-                <a:spcPts val="800"/>
-              </a:spcAft>
-              <a:defRPr sz="1800">
+                <a:spcPts val="300"/>
+              </a:spcAft>
+              <a:defRPr sz="1600">
+                <a:solidFill>
+                  <a:srgbClr val="FFFFFF"/>
+                </a:solidFill>
+              </a:defRPr>
+            </a:pPr>
+            <a:r>
+              <a:t>1. Cubo Principal  (vermelho)</a:t>
+            </a:r>
+          </a:p>
+          <a:p>
+            <a:pPr>
+              <a:spcAft>
+                <a:spcPts val="300"/>
+              </a:spcAft>
+              <a:defRPr sz="1600">
+                <a:solidFill>
+                  <a:srgbClr val="FFFFFF"/>
+                </a:solidFill>
+              </a:defRPr>
+            </a:pPr>
+            <a:r>
+              <a:t>     Geometria procedural, material Phong</a:t>
+            </a:r>
+          </a:p>
+          <a:p>
+            <a:pPr>
+              <a:spcAft>
+                <a:spcPts val="300"/>
+              </a:spcAft>
+              <a:defRPr sz="1600">
+                <a:solidFill>
+                  <a:srgbClr val="FFFFFF"/>
+                </a:solidFill>
+              </a:defRPr>
+            </a:pPr>
+          </a:p>
+          <a:p>
+            <a:pPr>
+              <a:spcAft>
+                <a:spcPts val="300"/>
+              </a:spcAft>
+              <a:defRPr sz="1600">
+                <a:solidFill>
+                  <a:srgbClr val="FFFFFF"/>
+                </a:solidFill>
+              </a:defRPr>
+            </a:pPr>
+            <a:r>
+              <a:t>2. Esfera Texturizada  (pixelWall)</a:t>
+            </a:r>
+          </a:p>
+          <a:p>
+            <a:pPr>
+              <a:spcAft>
+                <a:spcPts val="300"/>
+              </a:spcAft>
+              <a:defRPr sz="1600">
+                <a:solidFill>
+                  <a:srgbClr val="FFFFFF"/>
+                </a:solidFill>
+              </a:defRPr>
+            </a:pPr>
+            <a:r>
+              <a:t>     Geometria procedural, textura PNG</a:t>
+            </a:r>
+          </a:p>
+          <a:p>
+            <a:pPr>
+              <a:spcAft>
+                <a:spcPts val="300"/>
+              </a:spcAft>
+              <a:defRPr sz="1600">
+                <a:solidFill>
+                  <a:srgbClr val="FFFFFF"/>
+                </a:solidFill>
+              </a:defRPr>
+            </a:pPr>
+          </a:p>
+          <a:p>
+            <a:pPr>
+              <a:spcAft>
+                <a:spcPts val="300"/>
+              </a:spcAft>
+              <a:defRPr sz="1600">
+                <a:solidFill>
+                  <a:srgbClr val="FFFFFF"/>
+                </a:solidFill>
+              </a:defRPr>
+            </a:pPr>
+            <a:r>
+              <a:t>3. Piramide Azul</a:t>
+            </a:r>
+          </a:p>
+          <a:p>
+            <a:pPr>
+              <a:spcAft>
+                <a:spcPts val="300"/>
+              </a:spcAft>
+              <a:defRPr sz="1600">
+                <a:solidFill>
+                  <a:srgbClr val="FFFFFF"/>
+                </a:solidFill>
+              </a:defRPr>
+            </a:pPr>
+            <a:r>
+              <a:t>     Geometria procedural, rotacao 45 graus</a:t>
+            </a:r>
+          </a:p>
+          <a:p>
+            <a:pPr>
+              <a:spcAft>
+                <a:spcPts val="300"/>
+              </a:spcAft>
+              <a:defRPr sz="1600">
+                <a:solidFill>
+                  <a:srgbClr val="FFFFFF"/>
+                </a:solidFill>
+              </a:defRPr>
+            </a:pPr>
+          </a:p>
+          <a:p>
+            <a:pPr>
+              <a:spcAft>
+                <a:spcPts val="300"/>
+              </a:spcAft>
+              <a:defRPr sz="1600">
+                <a:solidFill>
+                  <a:srgbClr val="FFFFFF"/>
+                </a:solidFill>
+              </a:defRPr>
+            </a:pPr>
+            <a:r>
+              <a:t>4. Chao  (cinza)</a:t>
+            </a:r>
+          </a:p>
+          <a:p>
+            <a:pPr>
+              <a:spcAft>
+                <a:spcPts val="300"/>
+              </a:spcAft>
+              <a:defRPr sz="1600">
+                <a:solidFill>
+                  <a:srgbClr val="FFFFFF"/>
+                </a:solidFill>
+              </a:defRPr>
+            </a:pPr>
+            <a:r>
+              <a:t>     Cubo escalado como plano</a:t>
+            </a:r>
+          </a:p>
+          <a:p>
+            <a:pPr>
+              <a:spcAft>
+                <a:spcPts val="300"/>
+              </a:spcAft>
+              <a:defRPr sz="1600">
+                <a:solidFill>
+                  <a:srgbClr val="FFFFFF"/>
+                </a:solidFill>
+              </a:defRPr>
+            </a:pPr>
+          </a:p>
+          <a:p>
+            <a:pPr>
+              <a:spcAft>
+                <a:spcPts val="300"/>
+              </a:spcAft>
+              <a:defRPr sz="1600">
+                <a:solidFill>
+                  <a:srgbClr val="FFFFFF"/>
+                </a:solidFill>
+              </a:defRPr>
+            </a:pPr>
+            <a:r>
+              <a:t>5. Suzanne  (macaco)</a:t>
+            </a:r>
+          </a:p>
+          <a:p>
+            <a:pPr>
+              <a:spcAft>
+                <a:spcPts val="300"/>
+              </a:spcAft>
+              <a:defRPr sz="1600">
+                <a:solidFill>
+                  <a:srgbClr val="FFFFFF"/>
+                </a:solidFill>
+              </a:defRPr>
+            </a:pPr>
+            <a:r>
+              <a:t>     Modelo .obj + .mtl + textura automatica</a:t>
+            </a:r>
+          </a:p>
+        </p:txBody>
+      </p:sp>
+      <p:sp>
+        <p:nvSpPr>
+          <p:cNvPr id="6" name="TextBox 5"/>
+          <p:cNvSpPr txBox="1"/>
+          <p:nvPr/>
+        </p:nvSpPr>
+        <p:spPr>
+          <a:xfrm>
+            <a:off x="6400800" y="1463040"/>
+            <a:ext cx="5029200" cy="457200"/>
+          </a:xfrm>
+          <a:prstGeom prst="rect">
+            <a:avLst/>
+          </a:prstGeom>
+          <a:noFill/>
+        </p:spPr>
+        <p:txBody>
+          <a:bodyPr wrap="square">
+            <a:spAutoFit/>
+          </a:bodyPr>
+          <a:lstStyle/>
+          <a:p>
+            <a:pPr algn="l">
+              <a:defRPr sz="2200" b="1">
+                <a:solidFill>
+                  <a:srgbClr val="00E676"/>
+                </a:solidFill>
+              </a:defRPr>
+            </a:pPr>
+            <a:r>
+              <a:t>3 Fontes de Luz</a:t>
+            </a:r>
+          </a:p>
+        </p:txBody>
+      </p:sp>
+      <p:sp>
+        <p:nvSpPr>
+          <p:cNvPr id="7" name="TextBox 6"/>
+          <p:cNvSpPr txBox="1"/>
+          <p:nvPr/>
+        </p:nvSpPr>
+        <p:spPr>
+          <a:xfrm>
+            <a:off x="6400800" y="1920240"/>
+            <a:ext cx="5029200" cy="4114800"/>
+          </a:xfrm>
+          <a:prstGeom prst="rect">
+            <a:avLst/>
+          </a:prstGeom>
+          <a:noFill/>
+        </p:spPr>
+        <p:txBody>
+          <a:bodyPr wrap="square">
+            <a:spAutoFit/>
+          </a:bodyPr>
+          <a:lstStyle/>
+          <a:p>
+            <a:pPr>
+              <a:spcAft>
+                <a:spcPts val="300"/>
+              </a:spcAft>
+              <a:defRPr sz="1600">
                 <a:solidFill>
                   <a:srgbClr val="CCCCCC"/>
                 </a:solidFill>
               </a:defRPr>
             </a:pPr>
             <a:r>
-              <a:t>3 Fontes de Luz (Phong):</a:t>
-            </a:r>
-          </a:p>
-          <a:p>
-            <a:pPr>
-              <a:spcAft>
-                <a:spcPts val="800"/>
-              </a:spcAft>
-              <a:defRPr sz="1800">
+              <a:t>Key Light  (principal)</a:t>
+            </a:r>
+          </a:p>
+          <a:p>
+            <a:pPr>
+              <a:spcAft>
+                <a:spcPts val="300"/>
+              </a:spcAft>
+              <a:defRPr sz="1600">
                 <a:solidFill>
                   <a:srgbClr val="CCCCCC"/>
                 </a:solidFill>
               </a:defRPr>
             </a:pPr>
             <a:r>
-              <a:t>   Key Light - luz principal (branca)</a:t>
-            </a:r>
-          </a:p>
-          <a:p>
-            <a:pPr>
-              <a:spcAft>
-                <a:spcPts val="800"/>
-              </a:spcAft>
-              <a:defRPr sz="1800">
+              <a:t>     Posicao: (5, 5, 5)</a:t>
+            </a:r>
+          </a:p>
+          <a:p>
+            <a:pPr>
+              <a:spcAft>
+                <a:spcPts val="300"/>
+              </a:spcAft>
+              <a:defRPr sz="1600">
                 <a:solidFill>
                   <a:srgbClr val="CCCCCC"/>
                 </a:solidFill>
               </a:defRPr>
             </a:pPr>
             <a:r>
-              <a:t>   Fill Light - luz secundaria (azulada)</a:t>
-            </a:r>
-          </a:p>
-          <a:p>
-            <a:pPr>
-              <a:spcAft>
-                <a:spcPts val="800"/>
-              </a:spcAft>
-              <a:defRPr sz="1800">
+              <a:t>     Cor: branca, Intensidade: 1.0</a:t>
+            </a:r>
+          </a:p>
+          <a:p>
+            <a:pPr>
+              <a:spcAft>
+                <a:spcPts val="300"/>
+              </a:spcAft>
+              <a:defRPr sz="1600">
                 <a:solidFill>
                   <a:srgbClr val="CCCCCC"/>
                 </a:solidFill>
               </a:defRPr>
             </a:pPr>
-            <a:r>
-              <a:t>   Back Light - luz traseira (quente)</a:t>
-            </a:r>
-          </a:p>
-          <a:p>
-            <a:pPr>
-              <a:spcAft>
-                <a:spcPts val="800"/>
-              </a:spcAft>
-              <a:defRPr sz="1800">
+          </a:p>
+          <a:p>
+            <a:pPr>
+              <a:spcAft>
+                <a:spcPts val="300"/>
+              </a:spcAft>
+              <a:defRPr sz="1600">
                 <a:solidFill>
                   <a:srgbClr val="CCCCCC"/>
                 </a:solidFill>
               </a:defRPr>
             </a:pPr>
-          </a:p>
-          <a:p>
-            <a:pPr>
-              <a:spcAft>
-                <a:spcPts val="800"/>
-              </a:spcAft>
-              <a:defRPr sz="1800">
+            <a:r>
+              <a:t>Fill Light  (secundaria)</a:t>
+            </a:r>
+          </a:p>
+          <a:p>
+            <a:pPr>
+              <a:spcAft>
+                <a:spcPts val="300"/>
+              </a:spcAft>
+              <a:defRPr sz="1600">
                 <a:solidFill>
                   <a:srgbClr val="CCCCCC"/>
                 </a:solidFill>
               </a:defRPr>
             </a:pPr>
             <a:r>
-              <a:t>Arquivo de configuracao: scene.json</a:t>
+              <a:t>     Posicao: (-3, 3, 2)</a:t>
+            </a:r>
+          </a:p>
+          <a:p>
+            <a:pPr>
+              <a:spcAft>
+                <a:spcPts val="300"/>
+              </a:spcAft>
+              <a:defRPr sz="1600">
+                <a:solidFill>
+                  <a:srgbClr val="CCCCCC"/>
+                </a:solidFill>
+              </a:defRPr>
+            </a:pPr>
+            <a:r>
+              <a:t>     Cor: azulada, Intensidade: 0.6</a:t>
+            </a:r>
+          </a:p>
+          <a:p>
+            <a:pPr>
+              <a:spcAft>
+                <a:spcPts val="300"/>
+              </a:spcAft>
+              <a:defRPr sz="1600">
+                <a:solidFill>
+                  <a:srgbClr val="CCCCCC"/>
+                </a:solidFill>
+              </a:defRPr>
+            </a:pPr>
+          </a:p>
+          <a:p>
+            <a:pPr>
+              <a:spcAft>
+                <a:spcPts val="300"/>
+              </a:spcAft>
+              <a:defRPr sz="1600">
+                <a:solidFill>
+                  <a:srgbClr val="CCCCCC"/>
+                </a:solidFill>
+              </a:defRPr>
+            </a:pPr>
+            <a:r>
+              <a:t>Back Light  (traseira)</a:t>
+            </a:r>
+          </a:p>
+          <a:p>
+            <a:pPr>
+              <a:spcAft>
+                <a:spcPts val="300"/>
+              </a:spcAft>
+              <a:defRPr sz="1600">
+                <a:solidFill>
+                  <a:srgbClr val="CCCCCC"/>
+                </a:solidFill>
+              </a:defRPr>
+            </a:pPr>
+            <a:r>
+              <a:t>     Posicao: (0, 3, -5)</a:t>
+            </a:r>
+          </a:p>
+          <a:p>
+            <a:pPr>
+              <a:spcAft>
+                <a:spcPts val="300"/>
+              </a:spcAft>
+              <a:defRPr sz="1600">
+                <a:solidFill>
+                  <a:srgbClr val="CCCCCC"/>
+                </a:solidFill>
+              </a:defRPr>
+            </a:pPr>
+            <a:r>
+              <a:t>     Cor: quente, Intensidade: 0.4</a:t>
+            </a:r>
+          </a:p>
+          <a:p>
+            <a:pPr>
+              <a:spcAft>
+                <a:spcPts val="300"/>
+              </a:spcAft>
+              <a:defRPr sz="1600">
+                <a:solidFill>
+                  <a:srgbClr val="CCCCCC"/>
+                </a:solidFill>
+              </a:defRPr>
+            </a:pPr>
+          </a:p>
+          <a:p>
+            <a:pPr>
+              <a:spcAft>
+                <a:spcPts val="300"/>
+              </a:spcAft>
+              <a:defRPr sz="1600">
+                <a:solidFill>
+                  <a:srgbClr val="CCCCCC"/>
+                </a:solidFill>
+              </a:defRPr>
+            </a:pPr>
+            <a:r>
+              <a:t>Configuracao em scene.json</a:t>
             </a:r>
           </a:p>
         </p:txBody>
@@ -4207,7 +6631,7 @@
         </p:nvSpPr>
         <p:spPr>
           <a:xfrm>
-            <a:off x="731520" y="457200"/>
+            <a:off x="731520" y="365760"/>
             <a:ext cx="10698480" cy="731520"/>
           </a:xfrm>
           <a:prstGeom prst="rect">
@@ -4229,7 +6653,7 @@
               </a:defRPr>
             </a:pPr>
             <a:r>
-              <a:t>Funcionalidades</a:t>
+              <a:t>Camera FPS</a:t>
             </a:r>
           </a:p>
         </p:txBody>
@@ -4242,8 +6666,8 @@
         </p:nvSpPr>
         <p:spPr>
           <a:xfrm>
-            <a:off x="731520" y="1188720"/>
-            <a:ext cx="2743200" cy="45720"/>
+            <a:off x="731520" y="1097280"/>
+            <a:ext cx="3657600" cy="36576"/>
           </a:xfrm>
           <a:prstGeom prst="rect">
             <a:avLst/>
@@ -4285,8 +6709,8 @@
         </p:nvSpPr>
         <p:spPr>
           <a:xfrm>
-            <a:off x="731520" y="1645920"/>
-            <a:ext cx="5029200" cy="457200"/>
+            <a:off x="731520" y="1463040"/>
+            <a:ext cx="10698480" cy="2286000"/>
           </a:xfrm>
           <a:prstGeom prst="rect">
             <a:avLst/>
@@ -4299,15 +6723,48 @@
           </a:bodyPr>
           <a:lstStyle/>
           <a:p>
-            <a:pPr algn="l">
-              <a:defRPr sz="2200" b="1">
-                <a:solidFill>
-                  <a:srgbClr val="00E676"/>
-                </a:solidFill>
-              </a:defRPr>
-            </a:pPr>
-            <a:r>
-              <a:t>Camera FPS</a:t>
+            <a:pPr>
+              <a:spcAft>
+                <a:spcPts val="400"/>
+              </a:spcAft>
+              <a:defRPr sz="2000">
+                <a:solidFill>
+                  <a:srgbClr val="FFFFFF"/>
+                </a:solidFill>
+              </a:defRPr>
+            </a:pPr>
+            <a:r>
+              <a:t>Navegacao livre em primeira pessoa</a:t>
+            </a:r>
+          </a:p>
+          <a:p>
+            <a:pPr>
+              <a:spcAft>
+                <a:spcPts val="400"/>
+              </a:spcAft>
+              <a:defRPr sz="2000">
+                <a:solidFill>
+                  <a:srgbClr val="FFFFFF"/>
+                </a:solidFill>
+              </a:defRPr>
+            </a:pPr>
+            <a:r>
+              <a:t>Mesmo controle de jogos FPS (First Person Shooter)</a:t>
+            </a:r>
+          </a:p>
+          <a:p>
+            <a:pPr>
+              <a:spcAft>
+                <a:spcPts val="400"/>
+              </a:spcAft>
+              <a:defRPr sz="2000">
+                <a:solidFill>
+                  <a:srgbClr val="FFFFFF"/>
+                </a:solidFill>
+              </a:defRPr>
+            </a:pPr>
+            <a:r>
+              <a:t>Implementada na classe Camera (Camera.h / Camera.cpp)</a:t>
             </a:r>
           </a:p>
         </p:txBody>
@@ -4320,8 +6777,8 @@
         </p:nvSpPr>
         <p:spPr>
           <a:xfrm>
-            <a:off x="731520" y="2103120"/>
-            <a:ext cx="5029200" cy="1371600"/>
+            <a:off x="731520" y="2926080"/>
+            <a:ext cx="5029200" cy="457200"/>
           </a:xfrm>
           <a:prstGeom prst="rect">
             <a:avLst/>
@@ -4334,63 +6791,15 @@
           </a:bodyPr>
           <a:lstStyle/>
           <a:p>
-            <a:pPr>
-              <a:spcAft>
-                <a:spcPts val="800"/>
-              </a:spcAft>
-              <a:defRPr sz="1600">
-                <a:solidFill>
-                  <a:srgbClr val="FFFFFF"/>
-                </a:solidFill>
-              </a:defRPr>
-            </a:pPr>
-            <a:r>
-              <a:t>WASD - Mover</a:t>
-            </a:r>
-          </a:p>
-          <a:p>
-            <a:pPr>
-              <a:spcAft>
-                <a:spcPts val="800"/>
-              </a:spcAft>
-              <a:defRPr sz="1600">
-                <a:solidFill>
-                  <a:srgbClr val="FFFFFF"/>
-                </a:solidFill>
-              </a:defRPr>
-            </a:pPr>
-            <a:r>
-              <a:t>Q/E - Subir/Descer</a:t>
-            </a:r>
-          </a:p>
-          <a:p>
-            <a:pPr>
-              <a:spcAft>
-                <a:spcPts val="800"/>
-              </a:spcAft>
-              <a:defRPr sz="1600">
-                <a:solidFill>
-                  <a:srgbClr val="FFFFFF"/>
-                </a:solidFill>
-              </a:defRPr>
-            </a:pPr>
-            <a:r>
-              <a:t>Mouse - Olhar</a:t>
-            </a:r>
-          </a:p>
-          <a:p>
-            <a:pPr>
-              <a:spcAft>
-                <a:spcPts val="800"/>
-              </a:spcAft>
-              <a:defRPr sz="1600">
-                <a:solidFill>
-                  <a:srgbClr val="FFFFFF"/>
-                </a:solidFill>
-              </a:defRPr>
-            </a:pPr>
-            <a:r>
-              <a:t>Scroll - Zoom</a:t>
+            <a:pPr algn="l">
+              <a:defRPr sz="2200" b="1">
+                <a:solidFill>
+                  <a:srgbClr val="00E676"/>
+                </a:solidFill>
+              </a:defRPr>
+            </a:pPr>
+            <a:r>
+              <a:t>Atalhos de Teclado</a:t>
             </a:r>
           </a:p>
         </p:txBody>
@@ -4403,8 +6812,8 @@
         </p:nvSpPr>
         <p:spPr>
           <a:xfrm>
-            <a:off x="731520" y="3657600"/>
-            <a:ext cx="5029200" cy="457200"/>
+            <a:off x="731520" y="3383280"/>
+            <a:ext cx="5029200" cy="2743200"/>
           </a:xfrm>
           <a:prstGeom prst="rect">
             <a:avLst/>
@@ -4417,15 +6826,93 @@
           </a:bodyPr>
           <a:lstStyle/>
           <a:p>
-            <a:pPr algn="l">
-              <a:defRPr sz="2200" b="1">
-                <a:solidFill>
-                  <a:srgbClr val="00E676"/>
-                </a:solidFill>
-              </a:defRPr>
-            </a:pPr>
-            <a:r>
-              <a:t>Transformacoes</a:t>
+            <a:pPr>
+              <a:spcAft>
+                <a:spcPts val="300"/>
+              </a:spcAft>
+              <a:defRPr sz="1800">
+                <a:solidFill>
+                  <a:srgbClr val="FFFFFF"/>
+                </a:solidFill>
+              </a:defRPr>
+            </a:pPr>
+            <a:r>
+              <a:t>W  -  Mover para frente</a:t>
+            </a:r>
+          </a:p>
+          <a:p>
+            <a:pPr>
+              <a:spcAft>
+                <a:spcPts val="300"/>
+              </a:spcAft>
+              <a:defRPr sz="1800">
+                <a:solidFill>
+                  <a:srgbClr val="FFFFFF"/>
+                </a:solidFill>
+              </a:defRPr>
+            </a:pPr>
+            <a:r>
+              <a:t>S  -  Mover para tras</a:t>
+            </a:r>
+          </a:p>
+          <a:p>
+            <a:pPr>
+              <a:spcAft>
+                <a:spcPts val="300"/>
+              </a:spcAft>
+              <a:defRPr sz="1800">
+                <a:solidFill>
+                  <a:srgbClr val="FFFFFF"/>
+                </a:solidFill>
+              </a:defRPr>
+            </a:pPr>
+            <a:r>
+              <a:t>A  -  Mover para esquerda</a:t>
+            </a:r>
+          </a:p>
+          <a:p>
+            <a:pPr>
+              <a:spcAft>
+                <a:spcPts val="300"/>
+              </a:spcAft>
+              <a:defRPr sz="1800">
+                <a:solidFill>
+                  <a:srgbClr val="FFFFFF"/>
+                </a:solidFill>
+              </a:defRPr>
+            </a:pPr>
+            <a:r>
+              <a:t>D  -  Mover para direita</a:t>
+            </a:r>
+          </a:p>
+          <a:p>
+            <a:pPr>
+              <a:spcAft>
+                <a:spcPts val="300"/>
+              </a:spcAft>
+              <a:defRPr sz="1800">
+                <a:solidFill>
+                  <a:srgbClr val="FFFFFF"/>
+                </a:solidFill>
+              </a:defRPr>
+            </a:pPr>
+            <a:r>
+              <a:t>Q  -  Mover para baixo</a:t>
+            </a:r>
+          </a:p>
+          <a:p>
+            <a:pPr>
+              <a:spcAft>
+                <a:spcPts val="300"/>
+              </a:spcAft>
+              <a:defRPr sz="1800">
+                <a:solidFill>
+                  <a:srgbClr val="FFFFFF"/>
+                </a:solidFill>
+              </a:defRPr>
+            </a:pPr>
+            <a:r>
+              <a:t>E  -  Mover para cima</a:t>
             </a:r>
           </a:p>
         </p:txBody>
@@ -4438,8 +6925,8 @@
         </p:nvSpPr>
         <p:spPr>
           <a:xfrm>
-            <a:off x="731520" y="4114800"/>
-            <a:ext cx="5029200" cy="1371600"/>
+            <a:off x="6400800" y="2926080"/>
+            <a:ext cx="5029200" cy="457200"/>
           </a:xfrm>
           <a:prstGeom prst="rect">
             <a:avLst/>
@@ -4452,63 +6939,15 @@
           </a:bodyPr>
           <a:lstStyle/>
           <a:p>
-            <a:pPr>
-              <a:spcAft>
-                <a:spcPts val="800"/>
-              </a:spcAft>
-              <a:defRPr sz="1600">
-                <a:solidFill>
-                  <a:srgbClr val="FFFFFF"/>
-                </a:solidFill>
-              </a:defRPr>
-            </a:pPr>
-            <a:r>
-              <a:t>TAB - Trocar objeto</a:t>
-            </a:r>
-          </a:p>
-          <a:p>
-            <a:pPr>
-              <a:spcAft>
-                <a:spcPts val="800"/>
-              </a:spcAft>
-              <a:defRPr sz="1600">
-                <a:solidFill>
-                  <a:srgbClr val="FFFFFF"/>
-                </a:solidFill>
-              </a:defRPr>
-            </a:pPr>
-            <a:r>
-              <a:t>IJKL - Transladar</a:t>
-            </a:r>
-          </a:p>
-          <a:p>
-            <a:pPr>
-              <a:spcAft>
-                <a:spcPts val="800"/>
-              </a:spcAft>
-              <a:defRPr sz="1600">
-                <a:solidFill>
-                  <a:srgbClr val="FFFFFF"/>
-                </a:solidFill>
-              </a:defRPr>
-            </a:pPr>
-            <a:r>
-              <a:t>U/O - Rotacionar</a:t>
-            </a:r>
-          </a:p>
-          <a:p>
-            <a:pPr>
-              <a:spcAft>
-                <a:spcPts val="800"/>
-              </a:spcAft>
-              <a:defRPr sz="1600">
-                <a:solidFill>
-                  <a:srgbClr val="FFFFFF"/>
-                </a:solidFill>
-              </a:defRPr>
-            </a:pPr>
-            <a:r>
-              <a:t>+/- - Escalar</a:t>
+            <a:pPr algn="l">
+              <a:defRPr sz="2200" b="1">
+                <a:solidFill>
+                  <a:srgbClr val="00E676"/>
+                </a:solidFill>
+              </a:defRPr>
+            </a:pPr>
+            <a:r>
+              <a:t>Mouse</a:t>
             </a:r>
           </a:p>
         </p:txBody>
@@ -4521,8 +6960,8 @@
         </p:nvSpPr>
         <p:spPr>
           <a:xfrm>
-            <a:off x="6400800" y="1645920"/>
-            <a:ext cx="5029200" cy="457200"/>
+            <a:off x="6400800" y="3383280"/>
+            <a:ext cx="5029200" cy="2743200"/>
           </a:xfrm>
           <a:prstGeom prst="rect">
             <a:avLst/>
@@ -4535,15 +6974,48 @@
           </a:bodyPr>
           <a:lstStyle/>
           <a:p>
-            <a:pPr algn="l">
-              <a:defRPr sz="2200" b="1">
-                <a:solidFill>
-                  <a:srgbClr val="00E676"/>
-                </a:solidFill>
-              </a:defRPr>
-            </a:pPr>
-            <a:r>
-              <a:t>Iluminacao Phong</a:t>
+            <a:pPr>
+              <a:spcAft>
+                <a:spcPts val="300"/>
+              </a:spcAft>
+              <a:defRPr sz="1800">
+                <a:solidFill>
+                  <a:srgbClr val="FFFFFF"/>
+                </a:solidFill>
+              </a:defRPr>
+            </a:pPr>
+            <a:r>
+              <a:t>Movimento do mouse  -  Olhar em volta</a:t>
+            </a:r>
+          </a:p>
+          <a:p>
+            <a:pPr>
+              <a:spcAft>
+                <a:spcPts val="300"/>
+              </a:spcAft>
+              <a:defRPr sz="1800">
+                <a:solidFill>
+                  <a:srgbClr val="FFFFFF"/>
+                </a:solidFill>
+              </a:defRPr>
+            </a:pPr>
+            <a:r>
+              <a:t>Scroll  -  Zoom in/out</a:t>
+            </a:r>
+          </a:p>
+          <a:p>
+            <a:pPr>
+              <a:spcAft>
+                <a:spcPts val="300"/>
+              </a:spcAft>
+              <a:defRPr sz="1800">
+                <a:solidFill>
+                  <a:srgbClr val="FFFFFF"/>
+                </a:solidFill>
+              </a:defRPr>
+            </a:pPr>
+            <a:r>
+              <a:t>Cursor bloqueado na janela</a:t>
             </a:r>
           </a:p>
         </p:txBody>
@@ -4556,8 +7028,8 @@
         </p:nvSpPr>
         <p:spPr>
           <a:xfrm>
-            <a:off x="6400800" y="2103120"/>
-            <a:ext cx="5029200" cy="1371600"/>
+            <a:off x="731520" y="5029200"/>
+            <a:ext cx="10698480" cy="1371600"/>
           </a:xfrm>
           <a:prstGeom prst="rect">
             <a:avLst/>
@@ -4572,185 +7044,109 @@
           <a:p>
             <a:pPr>
               <a:spcAft>
-                <a:spcPts val="800"/>
-              </a:spcAft>
-              <a:defRPr sz="1600">
-                <a:solidFill>
-                  <a:srgbClr val="FFFFFF"/>
-                </a:solidFill>
-              </a:defRPr>
-            </a:pPr>
-            <a:r>
-              <a:t>F1/F2/F3 - Lig/deslig luz 1/2/3</a:t>
-            </a:r>
-          </a:p>
-          <a:p>
-            <a:pPr>
-              <a:spcAft>
-                <a:spcPts val="800"/>
-              </a:spcAft>
-              <a:defRPr sz="1600">
-                <a:solidFill>
-                  <a:srgbClr val="FFFFFF"/>
-                </a:solidFill>
-              </a:defRPr>
-            </a:pPr>
-            <a:r>
-              <a:t>F4 - Lig/deslig todas</a:t>
-            </a:r>
-          </a:p>
-          <a:p>
-            <a:pPr>
-              <a:spcAft>
-                <a:spcPts val="800"/>
-              </a:spcAft>
-              <a:defRPr sz="1600">
-                <a:solidFill>
-                  <a:srgbClr val="FFFFFF"/>
-                </a:solidFill>
-              </a:defRPr>
-            </a:pPr>
-            <a:r>
-              <a:t>ImGui - Editar posicao/cor/intensidade</a:t>
-            </a:r>
-          </a:p>
-        </p:txBody>
-      </p:sp>
-      <p:sp>
-        <p:nvSpPr>
-          <p:cNvPr id="10" name="TextBox 9"/>
-          <p:cNvSpPr txBox="1"/>
+                <a:spcPts val="200"/>
+              </a:spcAft>
+              <a:defRPr sz="1400">
+                <a:solidFill>
+                  <a:srgbClr val="00E676"/>
+                </a:solidFill>
+                <a:latin typeface="Consolas"/>
+              </a:defRPr>
+            </a:pPr>
+            <a:r>
+              <a:t>// Camera com posicao inicial em (0, 2, 8)</a:t>
+            </a:r>
+          </a:p>
+          <a:p>
+            <a:pPr>
+              <a:spcAft>
+                <a:spcPts val="200"/>
+              </a:spcAft>
+              <a:defRPr sz="1400">
+                <a:solidFill>
+                  <a:srgbClr val="00E676"/>
+                </a:solidFill>
+                <a:latin typeface="Consolas"/>
+              </a:defRPr>
+            </a:pPr>
+            <a:r>
+              <a:t>Camera camera(glm::vec3(0.0f, 2.0f, 8.0f));</a:t>
+            </a:r>
+          </a:p>
+          <a:p>
+            <a:pPr>
+              <a:spcAft>
+                <a:spcPts val="200"/>
+              </a:spcAft>
+              <a:defRPr sz="1400">
+                <a:solidFill>
+                  <a:srgbClr val="00E676"/>
+                </a:solidFill>
+                <a:latin typeface="Consolas"/>
+              </a:defRPr>
+            </a:pPr>
+            <a:r>
+              <a:t>glm::mat4 view = camera.getViewMatrix();</a:t>
+            </a:r>
+          </a:p>
+          <a:p>
+            <a:pPr>
+              <a:spcAft>
+                <a:spcPts val="200"/>
+              </a:spcAft>
+              <a:defRPr sz="1400">
+                <a:solidFill>
+                  <a:srgbClr val="00E676"/>
+                </a:solidFill>
+                <a:latin typeface="Consolas"/>
+              </a:defRPr>
+            </a:pPr>
+            <a:r>
+              <a:t>glm::mat4 proj = camera.getProjectionMatrix();</a:t>
+            </a:r>
+          </a:p>
+        </p:txBody>
+      </p:sp>
+      <p:sp>
+        <p:nvSpPr>
+          <p:cNvPr id="10" name="Rounded Rectangle 9"/>
+          <p:cNvSpPr/>
           <p:nvPr/>
         </p:nvSpPr>
         <p:spPr>
           <a:xfrm>
-            <a:off x="6400800" y="3657600"/>
-            <a:ext cx="5029200" cy="457200"/>
-          </a:xfrm>
-          <a:prstGeom prst="rect">
+            <a:off x="640080" y="4937760"/>
+            <a:ext cx="10881359" cy="1554480"/>
+          </a:xfrm>
+          <a:prstGeom prst="roundRect">
             <a:avLst/>
           </a:prstGeom>
-          <a:noFill/>
-        </p:spPr>
-        <p:txBody>
-          <a:bodyPr wrap="square">
-            <a:spAutoFit/>
-          </a:bodyPr>
-          <a:lstStyle/>
-          <a:p>
-            <a:pPr algn="l">
-              <a:defRPr sz="2200" b="1">
-                <a:solidFill>
-                  <a:srgbClr val="00E676"/>
-                </a:solidFill>
-              </a:defRPr>
-            </a:pPr>
-            <a:r>
-              <a:t>Texturas e Materiais</a:t>
-            </a:r>
-          </a:p>
-        </p:txBody>
-      </p:sp>
-      <p:sp>
-        <p:nvSpPr>
-          <p:cNvPr id="11" name="TextBox 10"/>
-          <p:cNvSpPr txBox="1"/>
-          <p:nvPr/>
-        </p:nvSpPr>
-        <p:spPr>
-          <a:xfrm>
-            <a:off x="6400800" y="4114800"/>
-            <a:ext cx="5029200" cy="1371600"/>
-          </a:xfrm>
-          <a:prstGeom prst="rect">
-            <a:avLst/>
-          </a:prstGeom>
-          <a:noFill/>
-        </p:spPr>
-        <p:txBody>
-          <a:bodyPr wrap="square">
-            <a:spAutoFit/>
-          </a:bodyPr>
-          <a:lstStyle/>
-          <a:p>
-            <a:pPr>
-              <a:spcAft>
-                <a:spcPts val="800"/>
-              </a:spcAft>
-              <a:defRPr sz="1600">
-                <a:solidFill>
-                  <a:srgbClr val="FFFFFF"/>
-                </a:solidFill>
-              </a:defRPr>
-            </a:pPr>
-            <a:r>
-              <a:t>Carregamento automatico .mtl</a:t>
-            </a:r>
-          </a:p>
-          <a:p>
-            <a:pPr>
-              <a:spcAft>
-                <a:spcPts val="800"/>
-              </a:spcAft>
-              <a:defRPr sz="1600">
-                <a:solidFill>
-                  <a:srgbClr val="FFFFFF"/>
-                </a:solidFill>
-              </a:defRPr>
-            </a:pPr>
-            <a:r>
-              <a:t>Troca manual via ImGui</a:t>
-            </a:r>
-          </a:p>
-          <a:p>
-            <a:pPr>
-              <a:spcAft>
-                <a:spcPts val="800"/>
-              </a:spcAft>
-              <a:defRPr sz="1600">
-                <a:solidFill>
-                  <a:srgbClr val="FFFFFF"/>
-                </a:solidFill>
-              </a:defRPr>
-            </a:pPr>
-            <a:r>
-              <a:t>Edicao de Ka, Kd, Ks, shininess</a:t>
-            </a:r>
-          </a:p>
-        </p:txBody>
-      </p:sp>
-      <p:sp>
-        <p:nvSpPr>
-          <p:cNvPr id="12" name="TextBox 11"/>
-          <p:cNvSpPr txBox="1"/>
-          <p:nvPr/>
-        </p:nvSpPr>
-        <p:spPr>
-          <a:xfrm>
-            <a:off x="731520" y="5486400"/>
-            <a:ext cx="10698480" cy="457200"/>
-          </a:xfrm>
-          <a:prstGeom prst="rect">
-            <a:avLst/>
-          </a:prstGeom>
-          <a:noFill/>
-        </p:spPr>
-        <p:txBody>
-          <a:bodyPr wrap="square">
-            <a:spAutoFit/>
-          </a:bodyPr>
-          <a:lstStyle/>
-          <a:p>
-            <a:pPr algn="ctr">
-              <a:defRPr sz="1600" b="1">
-                <a:solidFill>
-                  <a:srgbClr val="FF8C00"/>
-                </a:solidFill>
-              </a:defRPr>
-            </a:pPr>
-            <a:r>
-              <a:t>Animacao: SPACE (ativar) | B (Bezier) | 1-5 (pontos) | R (resetar) | UP/DOWN (velocidade)</a:t>
-            </a:r>
+          <a:solidFill>
+            <a:srgbClr val="0D1117"/>
+          </a:solidFill>
+          <a:ln>
+            <a:noFill/>
+          </a:ln>
+        </p:spPr>
+        <p:style>
+          <a:lnRef idx="1">
+            <a:schemeClr val="accent1"/>
+          </a:lnRef>
+          <a:fillRef idx="3">
+            <a:schemeClr val="accent1"/>
+          </a:fillRef>
+          <a:effectRef idx="2">
+            <a:schemeClr val="accent1"/>
+          </a:effectRef>
+          <a:fontRef idx="minor">
+            <a:schemeClr val="lt1"/>
+          </a:fontRef>
+        </p:style>
+        <p:txBody>
+          <a:bodyPr rtlCol="0" anchor="ctr"/>
+          <a:lstStyle/>
+          <a:p>
+            <a:pPr algn="ctr"/>
           </a:p>
         </p:txBody>
       </p:sp>
@@ -4788,7 +7184,7 @@
         </p:nvSpPr>
         <p:spPr>
           <a:xfrm>
-            <a:off x="731520" y="457200"/>
+            <a:off x="731520" y="365760"/>
             <a:ext cx="10698480" cy="731520"/>
           </a:xfrm>
           <a:prstGeom prst="rect">
@@ -4810,7 +7206,7 @@
               </a:defRPr>
             </a:pPr>
             <a:r>
-              <a:t>Iluminacao Phong - Fragment Shader</a:t>
+              <a:t>Transformacoes 3D</a:t>
             </a:r>
           </a:p>
         </p:txBody>
@@ -4823,8 +7219,8 @@
         </p:nvSpPr>
         <p:spPr>
           <a:xfrm>
-            <a:off x="731520" y="1188720"/>
-            <a:ext cx="4572000" cy="45720"/>
+            <a:off x="731520" y="1097280"/>
+            <a:ext cx="3657600" cy="36576"/>
           </a:xfrm>
           <a:prstGeom prst="rect">
             <a:avLst/>
@@ -4866,8 +7262,8 @@
         </p:nvSpPr>
         <p:spPr>
           <a:xfrm>
-            <a:off x="731520" y="1645920"/>
-            <a:ext cx="10698480" cy="457200"/>
+            <a:off x="731520" y="1463040"/>
+            <a:ext cx="10698480" cy="1371600"/>
           </a:xfrm>
           <a:prstGeom prst="rect">
             <a:avLst/>
@@ -4880,15 +7276,33 @@
           </a:bodyPr>
           <a:lstStyle/>
           <a:p>
-            <a:pPr algn="l">
-              <a:defRPr sz="2000" b="1">
-                <a:solidFill>
-                  <a:srgbClr val="FFFFFF"/>
-                </a:solidFill>
-              </a:defRPr>
-            </a:pPr>
-            <a:r>
-              <a:t>Modelo de iluminacao com 3 componentes:</a:t>
+            <a:pPr>
+              <a:spcAft>
+                <a:spcPts val="400"/>
+              </a:spcAft>
+              <a:defRPr sz="2000">
+                <a:solidFill>
+                  <a:srgbClr val="FFFFFF"/>
+                </a:solidFill>
+              </a:defRPr>
+            </a:pPr>
+            <a:r>
+              <a:t>Operacoes de Model Matrix: Translacao, Rotacao e Escala</a:t>
+            </a:r>
+          </a:p>
+          <a:p>
+            <a:pPr>
+              <a:spcAft>
+                <a:spcPts val="400"/>
+              </a:spcAft>
+              <a:defRPr sz="2000">
+                <a:solidFill>
+                  <a:srgbClr val="FFFFFF"/>
+                </a:solidFill>
+              </a:defRPr>
+            </a:pPr>
+            <a:r>
+              <a:t>Objetos podem ser selecionados e manipulados individualmente</a:t>
             </a:r>
           </a:p>
         </p:txBody>
@@ -4901,8 +7315,8 @@
         </p:nvSpPr>
         <p:spPr>
           <a:xfrm>
-            <a:off x="731520" y="2286000"/>
-            <a:ext cx="10698480" cy="4114800"/>
+            <a:off x="731520" y="2560320"/>
+            <a:ext cx="5029200" cy="457200"/>
           </a:xfrm>
           <a:prstGeom prst="rect">
             <a:avLst/>
@@ -4915,127 +7329,384 @@
           </a:bodyPr>
           <a:lstStyle/>
           <a:p>
-            <a:pPr>
-              <a:spcAft>
-                <a:spcPts val="800"/>
+            <a:pPr algn="l">
+              <a:defRPr sz="2200" b="1">
+                <a:solidFill>
+                  <a:srgbClr val="00E676"/>
+                </a:solidFill>
+              </a:defRPr>
+            </a:pPr>
+            <a:r>
+              <a:t>Atalhos</a:t>
+            </a:r>
+          </a:p>
+        </p:txBody>
+      </p:sp>
+      <p:sp>
+        <p:nvSpPr>
+          <p:cNvPr id="6" name="TextBox 5"/>
+          <p:cNvSpPr txBox="1"/>
+          <p:nvPr/>
+        </p:nvSpPr>
+        <p:spPr>
+          <a:xfrm>
+            <a:off x="731520" y="3017520"/>
+            <a:ext cx="5029200" cy="3200400"/>
+          </a:xfrm>
+          <a:prstGeom prst="rect">
+            <a:avLst/>
+          </a:prstGeom>
+          <a:noFill/>
+        </p:spPr>
+        <p:txBody>
+          <a:bodyPr wrap="square">
+            <a:spAutoFit/>
+          </a:bodyPr>
+          <a:lstStyle/>
+          <a:p>
+            <a:pPr>
+              <a:spcAft>
+                <a:spcPts val="300"/>
               </a:spcAft>
               <a:defRPr sz="1800">
                 <a:solidFill>
-                  <a:srgbClr val="CCCCCC"/>
-                </a:solidFill>
-              </a:defRPr>
-            </a:pPr>
-            <a:r>
-              <a:t>Ambient:  Ka * lightColor * lightIntensity</a:t>
-            </a:r>
-          </a:p>
-          <a:p>
-            <a:pPr>
-              <a:spcAft>
-                <a:spcPts val="800"/>
+                  <a:srgbClr val="FFFFFF"/>
+                </a:solidFill>
+              </a:defRPr>
+            </a:pPr>
+            <a:r>
+              <a:t>TAB  -  Trocar objeto selecionado</a:t>
+            </a:r>
+          </a:p>
+          <a:p>
+            <a:pPr>
+              <a:spcAft>
+                <a:spcPts val="300"/>
               </a:spcAft>
               <a:defRPr sz="1800">
                 <a:solidFill>
-                  <a:srgbClr val="CCCCCC"/>
-                </a:solidFill>
-              </a:defRPr>
-            </a:pPr>
-          </a:p>
-          <a:p>
-            <a:pPr>
-              <a:spcAft>
-                <a:spcPts val="800"/>
+                  <a:srgbClr val="FFFFFF"/>
+                </a:solidFill>
+              </a:defRPr>
+            </a:pPr>
+            <a:r>
+              <a:t>I / K  -  Transladar no eixo Z</a:t>
+            </a:r>
+          </a:p>
+          <a:p>
+            <a:pPr>
+              <a:spcAft>
+                <a:spcPts val="300"/>
               </a:spcAft>
               <a:defRPr sz="1800">
                 <a:solidFill>
-                  <a:srgbClr val="CCCCCC"/>
-                </a:solidFill>
-              </a:defRPr>
-            </a:pPr>
-            <a:r>
-              <a:t>Diffuse:  Kd * max(dot(N, L), 0.0) * lightColor * lightIntensity</a:t>
-            </a:r>
-          </a:p>
-          <a:p>
-            <a:pPr>
-              <a:spcAft>
-                <a:spcPts val="800"/>
+                  <a:srgbClr val="FFFFFF"/>
+                </a:solidFill>
+              </a:defRPr>
+            </a:pPr>
+            <a:r>
+              <a:t>J / L  -  Transladar no eixo X</a:t>
+            </a:r>
+          </a:p>
+          <a:p>
+            <a:pPr>
+              <a:spcAft>
+                <a:spcPts val="300"/>
               </a:spcAft>
               <a:defRPr sz="1800">
                 <a:solidFill>
-                  <a:srgbClr val="CCCCCC"/>
-                </a:solidFill>
-              </a:defRPr>
-            </a:pPr>
-          </a:p>
-          <a:p>
-            <a:pPr>
-              <a:spcAft>
-                <a:spcPts val="800"/>
+                  <a:srgbClr val="FFFFFF"/>
+                </a:solidFill>
+              </a:defRPr>
+            </a:pPr>
+            <a:r>
+              <a:t>U / O  -  Rotacionar no eixo Y</a:t>
+            </a:r>
+          </a:p>
+          <a:p>
+            <a:pPr>
+              <a:spcAft>
+                <a:spcPts val="300"/>
               </a:spcAft>
               <a:defRPr sz="1800">
                 <a:solidFill>
-                  <a:srgbClr val="CCCCCC"/>
-                </a:solidFill>
-              </a:defRPr>
-            </a:pPr>
-            <a:r>
-              <a:t>Specular: Ks * pow(max(dot(V, R), 0.0), shininess) * lightColor * lightIntensity</a:t>
-            </a:r>
-          </a:p>
-          <a:p>
-            <a:pPr>
-              <a:spcAft>
-                <a:spcPts val="800"/>
+                  <a:srgbClr val="FFFFFF"/>
+                </a:solidFill>
+              </a:defRPr>
+            </a:pPr>
+            <a:r>
+              <a:t>+  -  Aumentar escala</a:t>
+            </a:r>
+          </a:p>
+          <a:p>
+            <a:pPr>
+              <a:spcAft>
+                <a:spcPts val="300"/>
               </a:spcAft>
               <a:defRPr sz="1800">
                 <a:solidFill>
-                  <a:srgbClr val="CCCCCC"/>
-                </a:solidFill>
-              </a:defRPr>
-            </a:pPr>
-          </a:p>
-          <a:p>
-            <a:pPr>
-              <a:spcAft>
-                <a:spcPts val="800"/>
-              </a:spcAft>
-              <a:defRPr sz="1800">
-                <a:solidFill>
-                  <a:srgbClr val="CCCCCC"/>
-                </a:solidFill>
-              </a:defRPr>
-            </a:pPr>
-            <a:r>
-              <a:t>Atenuacao: 1.0 / (Kc + Kl*d + Kq*d^2)</a:t>
-            </a:r>
-          </a:p>
-          <a:p>
-            <a:pPr>
-              <a:spcAft>
-                <a:spcPts val="800"/>
-              </a:spcAft>
-              <a:defRPr sz="1800">
-                <a:solidFill>
-                  <a:srgbClr val="CCCCCC"/>
-                </a:solidFill>
-              </a:defRPr>
-            </a:pPr>
-          </a:p>
-          <a:p>
-            <a:pPr>
-              <a:spcAft>
-                <a:spcPts val="800"/>
-              </a:spcAft>
-              <a:defRPr sz="1800">
-                <a:solidFill>
-                  <a:srgbClr val="CCCCCC"/>
-                </a:solidFill>
-              </a:defRPr>
-            </a:pPr>
-            <a:r>
-              <a:t>Resultado = (ambient + diffuse) * objectColor + specular</a:t>
-            </a:r>
+                  <a:srgbClr val="FFFFFF"/>
+                </a:solidFill>
+              </a:defRPr>
+            </a:pPr>
+            <a:r>
+              <a:t>-  -  Diminuir escala</a:t>
+            </a:r>
+          </a:p>
+        </p:txBody>
+      </p:sp>
+      <p:sp>
+        <p:nvSpPr>
+          <p:cNvPr id="7" name="TextBox 6"/>
+          <p:cNvSpPr txBox="1"/>
+          <p:nvPr/>
+        </p:nvSpPr>
+        <p:spPr>
+          <a:xfrm>
+            <a:off x="6400800" y="2560320"/>
+            <a:ext cx="5029200" cy="3657600"/>
+          </a:xfrm>
+          <a:prstGeom prst="rect">
+            <a:avLst/>
+          </a:prstGeom>
+          <a:noFill/>
+        </p:spPr>
+        <p:txBody>
+          <a:bodyPr wrap="square">
+            <a:spAutoFit/>
+          </a:bodyPr>
+          <a:lstStyle/>
+          <a:p>
+            <a:pPr>
+              <a:spcAft>
+                <a:spcPts val="200"/>
+              </a:spcAft>
+              <a:defRPr sz="1300">
+                <a:solidFill>
+                  <a:srgbClr val="00E676"/>
+                </a:solidFill>
+                <a:latin typeface="Consolas"/>
+              </a:defRPr>
+            </a:pPr>
+            <a:r>
+              <a:t>// Aplicando transformacoes</a:t>
+            </a:r>
+          </a:p>
+          <a:p>
+            <a:pPr>
+              <a:spcAft>
+                <a:spcPts val="200"/>
+              </a:spcAft>
+              <a:defRPr sz="1300">
+                <a:solidFill>
+                  <a:srgbClr val="00E676"/>
+                </a:solidFill>
+                <a:latin typeface="Consolas"/>
+              </a:defRPr>
+            </a:pPr>
+            <a:r>
+              <a:t>glm::mat4 transform(1.0f);</a:t>
+            </a:r>
+          </a:p>
+          <a:p>
+            <a:pPr>
+              <a:spcAft>
+                <a:spcPts val="200"/>
+              </a:spcAft>
+              <a:defRPr sz="1300">
+                <a:solidFill>
+                  <a:srgbClr val="00E676"/>
+                </a:solidFill>
+                <a:latin typeface="Consolas"/>
+              </a:defRPr>
+            </a:pPr>
+            <a:r>
+              <a:t>transform = glm::translate(transform, pos);</a:t>
+            </a:r>
+          </a:p>
+          <a:p>
+            <a:pPr>
+              <a:spcAft>
+                <a:spcPts val="200"/>
+              </a:spcAft>
+              <a:defRPr sz="1300">
+                <a:solidFill>
+                  <a:srgbClr val="00E676"/>
+                </a:solidFill>
+                <a:latin typeface="Consolas"/>
+              </a:defRPr>
+            </a:pPr>
+            <a:r>
+              <a:t>transform = glm::rotate(transform,</a:t>
+            </a:r>
+          </a:p>
+          <a:p>
+            <a:pPr>
+              <a:spcAft>
+                <a:spcPts val="200"/>
+              </a:spcAft>
+              <a:defRPr sz="1300">
+                <a:solidFill>
+                  <a:srgbClr val="00E676"/>
+                </a:solidFill>
+                <a:latin typeface="Consolas"/>
+              </a:defRPr>
+            </a:pPr>
+            <a:r>
+              <a:t>    glm::radians(rot.y),</a:t>
+            </a:r>
+          </a:p>
+          <a:p>
+            <a:pPr>
+              <a:spcAft>
+                <a:spcPts val="200"/>
+              </a:spcAft>
+              <a:defRPr sz="1300">
+                <a:solidFill>
+                  <a:srgbClr val="00E676"/>
+                </a:solidFill>
+                <a:latin typeface="Consolas"/>
+              </a:defRPr>
+            </a:pPr>
+            <a:r>
+              <a:t>    glm::vec3(0.0f, 1.0f, 0.0f));</a:t>
+            </a:r>
+          </a:p>
+          <a:p>
+            <a:pPr>
+              <a:spcAft>
+                <a:spcPts val="200"/>
+              </a:spcAft>
+              <a:defRPr sz="1300">
+                <a:solidFill>
+                  <a:srgbClr val="00E676"/>
+                </a:solidFill>
+                <a:latin typeface="Consolas"/>
+              </a:defRPr>
+            </a:pPr>
+            <a:r>
+              <a:t>transform = glm::scale(transform, scl);</a:t>
+            </a:r>
+          </a:p>
+          <a:p>
+            <a:pPr>
+              <a:spcAft>
+                <a:spcPts val="200"/>
+              </a:spcAft>
+              <a:defRPr sz="1300">
+                <a:solidFill>
+                  <a:srgbClr val="00E676"/>
+                </a:solidFill>
+                <a:latin typeface="Consolas"/>
+              </a:defRPr>
+            </a:pPr>
+          </a:p>
+          <a:p>
+            <a:pPr>
+              <a:spcAft>
+                <a:spcPts val="200"/>
+              </a:spcAft>
+              <a:defRPr sz="1300">
+                <a:solidFill>
+                  <a:srgbClr val="00E676"/>
+                </a:solidFill>
+                <a:latin typeface="Consolas"/>
+              </a:defRPr>
+            </a:pPr>
+            <a:r>
+              <a:t>// Enviar para o shader</a:t>
+            </a:r>
+          </a:p>
+          <a:p>
+            <a:pPr>
+              <a:spcAft>
+                <a:spcPts val="200"/>
+              </a:spcAft>
+              <a:defRPr sz="1300">
+                <a:solidFill>
+                  <a:srgbClr val="00E676"/>
+                </a:solidFill>
+                <a:latin typeface="Consolas"/>
+              </a:defRPr>
+            </a:pPr>
+            <a:r>
+              <a:t>glUniformMatrix4fv(</a:t>
+            </a:r>
+          </a:p>
+          <a:p>
+            <a:pPr>
+              <a:spcAft>
+                <a:spcPts val="200"/>
+              </a:spcAft>
+              <a:defRPr sz="1300">
+                <a:solidFill>
+                  <a:srgbClr val="00E676"/>
+                </a:solidFill>
+                <a:latin typeface="Consolas"/>
+              </a:defRPr>
+            </a:pPr>
+            <a:r>
+              <a:t>    glGetUniformLocation(program, "model"),</a:t>
+            </a:r>
+          </a:p>
+          <a:p>
+            <a:pPr>
+              <a:spcAft>
+                <a:spcPts val="200"/>
+              </a:spcAft>
+              <a:defRPr sz="1300">
+                <a:solidFill>
+                  <a:srgbClr val="00E676"/>
+                </a:solidFill>
+                <a:latin typeface="Consolas"/>
+              </a:defRPr>
+            </a:pPr>
+            <a:r>
+              <a:t>    1, GL_FALSE, glm::value_ptr(transform));</a:t>
+            </a:r>
+          </a:p>
+        </p:txBody>
+      </p:sp>
+      <p:sp>
+        <p:nvSpPr>
+          <p:cNvPr id="8" name="Rounded Rectangle 7"/>
+          <p:cNvSpPr/>
+          <p:nvPr/>
+        </p:nvSpPr>
+        <p:spPr>
+          <a:xfrm>
+            <a:off x="6309360" y="2468879"/>
+            <a:ext cx="5212080" cy="3840480"/>
+          </a:xfrm>
+          <a:prstGeom prst="roundRect">
+            <a:avLst/>
+          </a:prstGeom>
+          <a:solidFill>
+            <a:srgbClr val="0D1117"/>
+          </a:solidFill>
+          <a:ln>
+            <a:noFill/>
+          </a:ln>
+        </p:spPr>
+        <p:style>
+          <a:lnRef idx="1">
+            <a:schemeClr val="accent1"/>
+          </a:lnRef>
+          <a:fillRef idx="3">
+            <a:schemeClr val="accent1"/>
+          </a:fillRef>
+          <a:effectRef idx="2">
+            <a:schemeClr val="accent1"/>
+          </a:effectRef>
+          <a:fontRef idx="minor">
+            <a:schemeClr val="lt1"/>
+          </a:fontRef>
+        </p:style>
+        <p:txBody>
+          <a:bodyPr rtlCol="0" anchor="ctr"/>
+          <a:lstStyle/>
+          <a:p>
+            <a:pPr algn="ctr"/>
           </a:p>
         </p:txBody>
       </p:sp>
@@ -5073,7 +7744,7 @@
         </p:nvSpPr>
         <p:spPr>
           <a:xfrm>
-            <a:off x="731520" y="457200"/>
+            <a:off x="731520" y="365760"/>
             <a:ext cx="10698480" cy="731520"/>
           </a:xfrm>
           <a:prstGeom prst="rect">
@@ -5095,7 +7766,7 @@
               </a:defRPr>
             </a:pPr>
             <a:r>
-              <a:t>Desafios Tecnicos</a:t>
+              <a:t>Iluminacao Phong</a:t>
             </a:r>
           </a:p>
         </p:txBody>
@@ -5108,8 +7779,8 @@
         </p:nvSpPr>
         <p:spPr>
           <a:xfrm>
-            <a:off x="731520" y="1188720"/>
-            <a:ext cx="2743200" cy="45720"/>
+            <a:off x="731520" y="1097280"/>
+            <a:ext cx="3657600" cy="36576"/>
           </a:xfrm>
           <a:prstGeom prst="rect">
             <a:avLst/>
@@ -5151,8 +7822,8 @@
         </p:nvSpPr>
         <p:spPr>
           <a:xfrm>
-            <a:off x="731520" y="1645920"/>
-            <a:ext cx="10698480" cy="4572000"/>
+            <a:off x="731520" y="1463040"/>
+            <a:ext cx="10698480" cy="1097280"/>
           </a:xfrm>
           <a:prstGeom prst="rect">
             <a:avLst/>
@@ -5167,7 +7838,80 @@
           <a:p>
             <a:pPr>
               <a:spcAft>
-                <a:spcPts val="800"/>
+                <a:spcPts val="400"/>
+              </a:spcAft>
+              <a:defRPr sz="2000">
+                <a:solidFill>
+                  <a:srgbClr val="FFFFFF"/>
+                </a:solidFill>
+              </a:defRPr>
+            </a:pPr>
+            <a:r>
+              <a:t>Modelo de iluminacao local com 3 componentes: Ambient + Diffuse + Specular</a:t>
+            </a:r>
+          </a:p>
+        </p:txBody>
+      </p:sp>
+      <p:sp>
+        <p:nvSpPr>
+          <p:cNvPr id="5" name="TextBox 4"/>
+          <p:cNvSpPr txBox="1"/>
+          <p:nvPr/>
+        </p:nvSpPr>
+        <p:spPr>
+          <a:xfrm>
+            <a:off x="731520" y="2286000"/>
+            <a:ext cx="5029200" cy="457200"/>
+          </a:xfrm>
+          <a:prstGeom prst="rect">
+            <a:avLst/>
+          </a:prstGeom>
+          <a:noFill/>
+        </p:spPr>
+        <p:txBody>
+          <a:bodyPr wrap="square">
+            <a:spAutoFit/>
+          </a:bodyPr>
+          <a:lstStyle/>
+          <a:p>
+            <a:pPr algn="l">
+              <a:defRPr sz="2200" b="1">
+                <a:solidFill>
+                  <a:srgbClr val="00E676"/>
+                </a:solidFill>
+              </a:defRPr>
+            </a:pPr>
+            <a:r>
+              <a:t>Atalhos de Luz</a:t>
+            </a:r>
+          </a:p>
+        </p:txBody>
+      </p:sp>
+      <p:sp>
+        <p:nvSpPr>
+          <p:cNvPr id="6" name="TextBox 5"/>
+          <p:cNvSpPr txBox="1"/>
+          <p:nvPr/>
+        </p:nvSpPr>
+        <p:spPr>
+          <a:xfrm>
+            <a:off x="731520" y="2743200"/>
+            <a:ext cx="5029200" cy="2286000"/>
+          </a:xfrm>
+          <a:prstGeom prst="rect">
+            <a:avLst/>
+          </a:prstGeom>
+          <a:noFill/>
+        </p:spPr>
+        <p:txBody>
+          <a:bodyPr wrap="square">
+            <a:spAutoFit/>
+          </a:bodyPr>
+          <a:lstStyle/>
+          <a:p>
+            <a:pPr>
+              <a:spcAft>
+                <a:spcPts val="300"/>
               </a:spcAft>
               <a:defRPr sz="1800">
                 <a:solidFill>
@@ -5176,13 +7920,13 @@
               </a:defRPr>
             </a:pPr>
             <a:r>
-              <a:t>Dangling pointer: SceneObject local era destruido antes do render loop</a:t>
-            </a:r>
-          </a:p>
-          <a:p>
-            <a:pPr>
-              <a:spcAft>
-                <a:spcPts val="800"/>
+              <a:t>F1  -  Lig/deslig Key Light</a:t>
+            </a:r>
+          </a:p>
+          <a:p>
+            <a:pPr>
+              <a:spcAft>
+                <a:spcPts val="300"/>
               </a:spcAft>
               <a:defRPr sz="1800">
                 <a:solidFill>
@@ -5191,13 +7935,13 @@
               </a:defRPr>
             </a:pPr>
             <a:r>
-              <a:t>   Solucao: armazenar por valor (SceneObject config) em vez de ponteiro</a:t>
-            </a:r>
-          </a:p>
-          <a:p>
-            <a:pPr>
-              <a:spcAft>
-                <a:spcPts val="800"/>
+              <a:t>F2  -  Lig/deslig Fill Light</a:t>
+            </a:r>
+          </a:p>
+          <a:p>
+            <a:pPr>
+              <a:spcAft>
+                <a:spcPts val="300"/>
               </a:spcAft>
               <a:defRPr sz="1800">
                 <a:solidFill>
@@ -5205,11 +7949,14 @@
                 </a:solidFill>
               </a:defRPr>
             </a:pPr>
-          </a:p>
-          <a:p>
-            <a:pPr>
-              <a:spcAft>
-                <a:spcPts val="800"/>
+            <a:r>
+              <a:t>F3  -  Lig/deslig Back Light</a:t>
+            </a:r>
+          </a:p>
+          <a:p>
+            <a:pPr>
+              <a:spcAft>
+                <a:spcPts val="300"/>
               </a:spcAft>
               <a:defRPr sz="1800">
                 <a:solidFill>
@@ -5218,13 +7965,71 @@
               </a:defRPr>
             </a:pPr>
             <a:r>
-              <a:t>Shaders #version 450 vs OpenGL 4.1 context</a:t>
-            </a:r>
-          </a:p>
-          <a:p>
-            <a:pPr>
-              <a:spcAft>
-                <a:spcPts val="800"/>
+              <a:t>F4  -  Lig/deslig todas</a:t>
+            </a:r>
+          </a:p>
+        </p:txBody>
+      </p:sp>
+      <p:sp>
+        <p:nvSpPr>
+          <p:cNvPr id="7" name="TextBox 6"/>
+          <p:cNvSpPr txBox="1"/>
+          <p:nvPr/>
+        </p:nvSpPr>
+        <p:spPr>
+          <a:xfrm>
+            <a:off x="6400800" y="2286000"/>
+            <a:ext cx="5029200" cy="457200"/>
+          </a:xfrm>
+          <a:prstGeom prst="rect">
+            <a:avLst/>
+          </a:prstGeom>
+          <a:noFill/>
+        </p:spPr>
+        <p:txBody>
+          <a:bodyPr wrap="square">
+            <a:spAutoFit/>
+          </a:bodyPr>
+          <a:lstStyle/>
+          <a:p>
+            <a:pPr algn="l">
+              <a:defRPr sz="2200" b="1">
+                <a:solidFill>
+                  <a:srgbClr val="00E676"/>
+                </a:solidFill>
+              </a:defRPr>
+            </a:pPr>
+            <a:r>
+              <a:t>ImGui</a:t>
+            </a:r>
+          </a:p>
+        </p:txBody>
+      </p:sp>
+      <p:sp>
+        <p:nvSpPr>
+          <p:cNvPr id="8" name="TextBox 7"/>
+          <p:cNvSpPr txBox="1"/>
+          <p:nvPr/>
+        </p:nvSpPr>
+        <p:spPr>
+          <a:xfrm>
+            <a:off x="6400800" y="2743200"/>
+            <a:ext cx="5029200" cy="2286000"/>
+          </a:xfrm>
+          <a:prstGeom prst="rect">
+            <a:avLst/>
+          </a:prstGeom>
+          <a:noFill/>
+        </p:spPr>
+        <p:txBody>
+          <a:bodyPr wrap="square">
+            <a:spAutoFit/>
+          </a:bodyPr>
+          <a:lstStyle/>
+          <a:p>
+            <a:pPr>
+              <a:spcAft>
+                <a:spcPts val="300"/>
               </a:spcAft>
               <a:defRPr sz="1800">
                 <a:solidFill>
@@ -5233,13 +8038,13 @@
               </a:defRPr>
             </a:pPr>
             <a:r>
-              <a:t>   Solucao: alterar para #version 410 para compatibilidade</a:t>
-            </a:r>
-          </a:p>
-          <a:p>
-            <a:pPr>
-              <a:spcAft>
-                <a:spcPts val="800"/>
+              <a:t>Ativar/desligar cada luz</a:t>
+            </a:r>
+          </a:p>
+          <a:p>
+            <a:pPr>
+              <a:spcAft>
+                <a:spcPts val="300"/>
               </a:spcAft>
               <a:defRPr sz="1800">
                 <a:solidFill>
@@ -5247,11 +8052,14 @@
                 </a:solidFill>
               </a:defRPr>
             </a:pPr>
-          </a:p>
-          <a:p>
-            <a:pPr>
-              <a:spcAft>
-                <a:spcPts val="800"/>
+            <a:r>
+              <a:t>Editar posicao (arrastar)</a:t>
+            </a:r>
+          </a:p>
+          <a:p>
+            <a:pPr>
+              <a:spcAft>
+                <a:spcPts val="300"/>
               </a:spcAft>
               <a:defRPr sz="1800">
                 <a:solidFill>
@@ -5260,13 +8068,13 @@
               </a:defRPr>
             </a:pPr>
             <a:r>
-              <a:t>Shallow clone impedia push para GitHub</a:t>
-            </a:r>
-          </a:p>
-          <a:p>
-            <a:pPr>
-              <a:spcAft>
-                <a:spcPts val="800"/>
+              <a:t>Editar cor (color picker)</a:t>
+            </a:r>
+          </a:p>
+          <a:p>
+            <a:pPr>
+              <a:spcAft>
+                <a:spcPts val="300"/>
               </a:spcAft>
               <a:defRPr sz="1800">
                 <a:solidFill>
@@ -5275,35 +8083,186 @@
               </a:defRPr>
             </a:pPr>
             <a:r>
-              <a:t>   Solucao: git fetch --unshallow antes do push</a:t>
-            </a:r>
-          </a:p>
-          <a:p>
-            <a:pPr>
-              <a:spcAft>
-                <a:spcPts val="800"/>
-              </a:spcAft>
-              <a:defRPr sz="1800">
-                <a:solidFill>
-                  <a:srgbClr val="FFFFFF"/>
-                </a:solidFill>
-              </a:defRPr>
-            </a:pPr>
-          </a:p>
-          <a:p>
-            <a:pPr>
-              <a:spcAft>
-                <a:spcPts val="800"/>
-              </a:spcAft>
-              <a:defRPr sz="1800">
-                <a:solidFill>
-                  <a:srgbClr val="FFFFFF"/>
-                </a:solidFill>
-              </a:defRPr>
-            </a:pPr>
-            <a:r>
-              <a:t>Parser .obj com suporte a multi-materiais e texturas</a:t>
-            </a:r>
+              <a:t>Ajustar intensidade (slider)</a:t>
+            </a:r>
+          </a:p>
+        </p:txBody>
+      </p:sp>
+      <p:sp>
+        <p:nvSpPr>
+          <p:cNvPr id="9" name="TextBox 8"/>
+          <p:cNvSpPr txBox="1"/>
+          <p:nvPr/>
+        </p:nvSpPr>
+        <p:spPr>
+          <a:xfrm>
+            <a:off x="731520" y="4572000"/>
+            <a:ext cx="10698480" cy="2011680"/>
+          </a:xfrm>
+          <a:prstGeom prst="rect">
+            <a:avLst/>
+          </a:prstGeom>
+          <a:noFill/>
+        </p:spPr>
+        <p:txBody>
+          <a:bodyPr wrap="square">
+            <a:spAutoFit/>
+          </a:bodyPr>
+          <a:lstStyle/>
+          <a:p>
+            <a:pPr>
+              <a:spcAft>
+                <a:spcPts val="200"/>
+              </a:spcAft>
+              <a:defRPr sz="1300">
+                <a:solidFill>
+                  <a:srgbClr val="00E676"/>
+                </a:solidFill>
+                <a:latin typeface="Consolas"/>
+              </a:defRPr>
+            </a:pPr>
+            <a:r>
+              <a:t>// Fragment Shader - Phong Lighting</a:t>
+            </a:r>
+          </a:p>
+          <a:p>
+            <a:pPr>
+              <a:spcAft>
+                <a:spcPts val="200"/>
+              </a:spcAft>
+              <a:defRPr sz="1300">
+                <a:solidFill>
+                  <a:srgbClr val="00E676"/>
+                </a:solidFill>
+                <a:latin typeface="Consolas"/>
+              </a:defRPr>
+            </a:pPr>
+            <a:r>
+              <a:t>vec3 ambient  = Ka * lightColor[i] * lightIntensity[i];</a:t>
+            </a:r>
+          </a:p>
+          <a:p>
+            <a:pPr>
+              <a:spcAft>
+                <a:spcPts val="200"/>
+              </a:spcAft>
+              <a:defRPr sz="1300">
+                <a:solidFill>
+                  <a:srgbClr val="00E676"/>
+                </a:solidFill>
+                <a:latin typeface="Consolas"/>
+              </a:defRPr>
+            </a:pPr>
+            <a:r>
+              <a:t>float diff    = max(dot(N, L), 0.0);</a:t>
+            </a:r>
+          </a:p>
+          <a:p>
+            <a:pPr>
+              <a:spcAft>
+                <a:spcPts val="200"/>
+              </a:spcAft>
+              <a:defRPr sz="1300">
+                <a:solidFill>
+                  <a:srgbClr val="00E676"/>
+                </a:solidFill>
+                <a:latin typeface="Consolas"/>
+              </a:defRPr>
+            </a:pPr>
+            <a:r>
+              <a:t>vec3 diffuse  = Kd * diff * lightColor[i] * lightIntensity[i];</a:t>
+            </a:r>
+          </a:p>
+          <a:p>
+            <a:pPr>
+              <a:spcAft>
+                <a:spcPts val="200"/>
+              </a:spcAft>
+              <a:defRPr sz="1300">
+                <a:solidFill>
+                  <a:srgbClr val="00E676"/>
+                </a:solidFill>
+                <a:latin typeface="Consolas"/>
+              </a:defRPr>
+            </a:pPr>
+            <a:r>
+              <a:t>float spec    = pow(max(dot(V, R), 0.0), shininess);</a:t>
+            </a:r>
+          </a:p>
+          <a:p>
+            <a:pPr>
+              <a:spcAft>
+                <a:spcPts val="200"/>
+              </a:spcAft>
+              <a:defRPr sz="1300">
+                <a:solidFill>
+                  <a:srgbClr val="00E676"/>
+                </a:solidFill>
+                <a:latin typeface="Consolas"/>
+              </a:defRPr>
+            </a:pPr>
+            <a:r>
+              <a:t>vec3 specular = Ks * spec * lightColor[i] * lightIntensity[i];</a:t>
+            </a:r>
+          </a:p>
+          <a:p>
+            <a:pPr>
+              <a:spcAft>
+                <a:spcPts val="200"/>
+              </a:spcAft>
+              <a:defRPr sz="1300">
+                <a:solidFill>
+                  <a:srgbClr val="00E676"/>
+                </a:solidFill>
+                <a:latin typeface="Consolas"/>
+              </a:defRPr>
+            </a:pPr>
+            <a:r>
+              <a:t>result += (ambient + diffuse) * objectColor + specular;</a:t>
+            </a:r>
+          </a:p>
+        </p:txBody>
+      </p:sp>
+      <p:sp>
+        <p:nvSpPr>
+          <p:cNvPr id="10" name="Rounded Rectangle 9"/>
+          <p:cNvSpPr/>
+          <p:nvPr/>
+        </p:nvSpPr>
+        <p:spPr>
+          <a:xfrm>
+            <a:off x="640080" y="4480560"/>
+            <a:ext cx="10881359" cy="2194560"/>
+          </a:xfrm>
+          <a:prstGeom prst="roundRect">
+            <a:avLst/>
+          </a:prstGeom>
+          <a:solidFill>
+            <a:srgbClr val="0D1117"/>
+          </a:solidFill>
+          <a:ln>
+            <a:noFill/>
+          </a:ln>
+        </p:spPr>
+        <p:style>
+          <a:lnRef idx="1">
+            <a:schemeClr val="accent1"/>
+          </a:lnRef>
+          <a:fillRef idx="3">
+            <a:schemeClr val="accent1"/>
+          </a:fillRef>
+          <a:effectRef idx="2">
+            <a:schemeClr val="accent1"/>
+          </a:effectRef>
+          <a:fontRef idx="minor">
+            <a:schemeClr val="lt1"/>
+          </a:fontRef>
+        </p:style>
+        <p:txBody>
+          <a:bodyPr rtlCol="0" anchor="ctr"/>
+          <a:lstStyle/>
+          <a:p>
+            <a:pPr algn="ctr"/>
           </a:p>
         </p:txBody>
       </p:sp>
@@ -5341,7 +8300,7 @@
         </p:nvSpPr>
         <p:spPr>
           <a:xfrm>
-            <a:off x="731520" y="457200"/>
+            <a:off x="731520" y="365760"/>
             <a:ext cx="10698480" cy="731520"/>
           </a:xfrm>
           <a:prstGeom prst="rect">
@@ -5363,7 +8322,7 @@
               </a:defRPr>
             </a:pPr>
             <a:r>
-              <a:t>Referencias</a:t>
+              <a:t>Texturas e Materiais</a:t>
             </a:r>
           </a:p>
         </p:txBody>
@@ -5376,8 +8335,8 @@
         </p:nvSpPr>
         <p:spPr>
           <a:xfrm>
-            <a:off x="731520" y="1188720"/>
-            <a:ext cx="2743200" cy="45720"/>
+            <a:off x="731520" y="1097280"/>
+            <a:ext cx="3657600" cy="36576"/>
           </a:xfrm>
           <a:prstGeom prst="rect">
             <a:avLst/>
@@ -5419,8 +8378,8 @@
         </p:nvSpPr>
         <p:spPr>
           <a:xfrm>
-            <a:off x="731520" y="1645920"/>
-            <a:ext cx="10698480" cy="4572000"/>
+            <a:off x="731520" y="1463040"/>
+            <a:ext cx="5029200" cy="457200"/>
           </a:xfrm>
           <a:prstGeom prst="rect">
             <a:avLst/>
@@ -5433,124 +8392,449 @@
           </a:bodyPr>
           <a:lstStyle/>
           <a:p>
-            <a:pPr>
-              <a:spcAft>
-                <a:spcPts val="800"/>
-              </a:spcAft>
-              <a:defRPr sz="1800">
-                <a:solidFill>
-                  <a:srgbClr val="CCCCCC"/>
-                </a:solidFill>
-              </a:defRPr>
-            </a:pPr>
-            <a:r>
-              <a:t>LearnOpenGL - https://learnopengl.com/</a:t>
-            </a:r>
-          </a:p>
-          <a:p>
-            <a:pPr>
-              <a:spcAft>
-                <a:spcPts val="800"/>
-              </a:spcAft>
-              <a:defRPr sz="1800">
-                <a:solidFill>
-                  <a:srgbClr val="CCCCCC"/>
-                </a:solidFill>
-              </a:defRPr>
-            </a:pPr>
-            <a:r>
-              <a:t>OpenGL Documentation - https://docs.gl/</a:t>
-            </a:r>
-          </a:p>
-          <a:p>
-            <a:pPr>
-              <a:spcAft>
-                <a:spcPts val="800"/>
-              </a:spcAft>
-              <a:defRPr sz="1800">
-                <a:solidFill>
-                  <a:srgbClr val="CCCCCC"/>
-                </a:solidFill>
-              </a:defRPr>
-            </a:pPr>
-            <a:r>
-              <a:t>GLM Documentation - https://glm.g-truc.net/</a:t>
-            </a:r>
-          </a:p>
-          <a:p>
-            <a:pPr>
-              <a:spcAft>
-                <a:spcPts val="800"/>
-              </a:spcAft>
-              <a:defRPr sz="1800">
-                <a:solidFill>
-                  <a:srgbClr val="CCCCCC"/>
-                </a:solidFill>
-              </a:defRPr>
-            </a:pPr>
-            <a:r>
-              <a:t>ImGui Documentation - https://github.com/ocornut/imgui</a:t>
-            </a:r>
-          </a:p>
-          <a:p>
-            <a:pPr>
-              <a:spcAft>
-                <a:spcPts val="800"/>
-              </a:spcAft>
-              <a:defRPr sz="1800">
-                <a:solidFill>
-                  <a:srgbClr val="CCCCCC"/>
-                </a:solidFill>
-              </a:defRPr>
-            </a:pPr>
-            <a:r>
-              <a:t>GLAD Generator - https://glad.dav1d.de/</a:t>
-            </a:r>
-          </a:p>
-          <a:p>
-            <a:pPr>
-              <a:spcAft>
-                <a:spcPts val="800"/>
-              </a:spcAft>
-              <a:defRPr sz="1800">
-                <a:solidFill>
-                  <a:srgbClr val="CCCCCC"/>
-                </a:solidFill>
-              </a:defRPr>
-            </a:pPr>
-            <a:r>
-              <a:t>CMake FetchContent - https://cmake.org/cmake/help/latest/module/FetchContent.html</a:t>
-            </a:r>
-          </a:p>
-          <a:p>
-            <a:pPr>
-              <a:spcAft>
-                <a:spcPts val="800"/>
-              </a:spcAft>
-              <a:defRPr sz="1800">
-                <a:solidFill>
-                  <a:srgbClr val="CCCCCC"/>
-                </a:solidFill>
-              </a:defRPr>
-            </a:pPr>
-            <a:r>
-              <a:t>Suzanne model - Blender (开源)</a:t>
-            </a:r>
-          </a:p>
-          <a:p>
-            <a:pPr>
-              <a:spcAft>
-                <a:spcPts val="800"/>
-              </a:spcAft>
-              <a:defRPr sz="1800">
-                <a:solidFill>
-                  <a:srgbClr val="CCCCCC"/>
-                </a:solidFill>
-              </a:defRPr>
-            </a:pPr>
-            <a:r>
-              <a:t>Texturas - https://ambientcg.com/</a:t>
-            </a:r>
+            <a:pPr algn="l">
+              <a:defRPr sz="2200" b="1">
+                <a:solidFill>
+                  <a:srgbClr val="00E676"/>
+                </a:solidFill>
+              </a:defRPr>
+            </a:pPr>
+            <a:r>
+              <a:t>Materiais (.mtl)</a:t>
+            </a:r>
+          </a:p>
+        </p:txBody>
+      </p:sp>
+      <p:sp>
+        <p:nvSpPr>
+          <p:cNvPr id="5" name="TextBox 4"/>
+          <p:cNvSpPr txBox="1"/>
+          <p:nvPr/>
+        </p:nvSpPr>
+        <p:spPr>
+          <a:xfrm>
+            <a:off x="731520" y="1920240"/>
+            <a:ext cx="5029200" cy="2743200"/>
+          </a:xfrm>
+          <a:prstGeom prst="rect">
+            <a:avLst/>
+          </a:prstGeom>
+          <a:noFill/>
+        </p:spPr>
+        <p:txBody>
+          <a:bodyPr wrap="square">
+            <a:spAutoFit/>
+          </a:bodyPr>
+          <a:lstStyle/>
+          <a:p>
+            <a:pPr>
+              <a:spcAft>
+                <a:spcPts val="300"/>
+              </a:spcAft>
+              <a:defRPr sz="1600">
+                <a:solidFill>
+                  <a:srgbClr val="FFFFFF"/>
+                </a:solidFill>
+              </a:defRPr>
+            </a:pPr>
+            <a:r>
+              <a:t>Ka  -  Coeficiente ambiental</a:t>
+            </a:r>
+          </a:p>
+          <a:p>
+            <a:pPr>
+              <a:spcAft>
+                <a:spcPts val="300"/>
+              </a:spcAft>
+              <a:defRPr sz="1600">
+                <a:solidFill>
+                  <a:srgbClr val="FFFFFF"/>
+                </a:solidFill>
+              </a:defRPr>
+            </a:pPr>
+            <a:r>
+              <a:t>Kd  -  Coeficiente difuso</a:t>
+            </a:r>
+          </a:p>
+          <a:p>
+            <a:pPr>
+              <a:spcAft>
+                <a:spcPts val="300"/>
+              </a:spcAft>
+              <a:defRPr sz="1600">
+                <a:solidFill>
+                  <a:srgbClr val="FFFFFF"/>
+                </a:solidFill>
+              </a:defRPr>
+            </a:pPr>
+            <a:r>
+              <a:t>Ks  -  Coeficiente especular</a:t>
+            </a:r>
+          </a:p>
+          <a:p>
+            <a:pPr>
+              <a:spcAft>
+                <a:spcPts val="300"/>
+              </a:spcAft>
+              <a:defRPr sz="1600">
+                <a:solidFill>
+                  <a:srgbClr val="FFFFFF"/>
+                </a:solidFill>
+              </a:defRPr>
+            </a:pPr>
+            <a:r>
+              <a:t>Ns  -  Expoente de brilho</a:t>
+            </a:r>
+          </a:p>
+          <a:p>
+            <a:pPr>
+              <a:spcAft>
+                <a:spcPts val="300"/>
+              </a:spcAft>
+              <a:defRPr sz="1600">
+                <a:solidFill>
+                  <a:srgbClr val="FFFFFF"/>
+                </a:solidFill>
+              </a:defRPr>
+            </a:pPr>
+            <a:r>
+              <a:t>map_Kd  -  Textura difusa (imagem)</a:t>
+            </a:r>
+          </a:p>
+          <a:p>
+            <a:pPr>
+              <a:spcAft>
+                <a:spcPts val="300"/>
+              </a:spcAft>
+              <a:defRPr sz="1600">
+                <a:solidFill>
+                  <a:srgbClr val="FFFFFF"/>
+                </a:solidFill>
+              </a:defRPr>
+            </a:pPr>
+          </a:p>
+          <a:p>
+            <a:pPr>
+              <a:spcAft>
+                <a:spcPts val="300"/>
+              </a:spcAft>
+              <a:defRPr sz="1600">
+                <a:solidFill>
+                  <a:srgbClr val="FFFFFF"/>
+                </a:solidFill>
+              </a:defRPr>
+            </a:pPr>
+            <a:r>
+              <a:t>Carregamento automatico do .mtl</a:t>
+            </a:r>
+          </a:p>
+          <a:p>
+            <a:pPr>
+              <a:spcAft>
+                <a:spcPts val="300"/>
+              </a:spcAft>
+              <a:defRPr sz="1600">
+                <a:solidFill>
+                  <a:srgbClr val="FFFFFF"/>
+                </a:solidFill>
+              </a:defRPr>
+            </a:pPr>
+            <a:r>
+              <a:t>Edicao em tempo real via ImGui</a:t>
+            </a:r>
+          </a:p>
+        </p:txBody>
+      </p:sp>
+      <p:sp>
+        <p:nvSpPr>
+          <p:cNvPr id="6" name="TextBox 5"/>
+          <p:cNvSpPr txBox="1"/>
+          <p:nvPr/>
+        </p:nvSpPr>
+        <p:spPr>
+          <a:xfrm>
+            <a:off x="6400800" y="1463040"/>
+            <a:ext cx="5029200" cy="457200"/>
+          </a:xfrm>
+          <a:prstGeom prst="rect">
+            <a:avLst/>
+          </a:prstGeom>
+          <a:noFill/>
+        </p:spPr>
+        <p:txBody>
+          <a:bodyPr wrap="square">
+            <a:spAutoFit/>
+          </a:bodyPr>
+          <a:lstStyle/>
+          <a:p>
+            <a:pPr algn="l">
+              <a:defRPr sz="2200" b="1">
+                <a:solidFill>
+                  <a:srgbClr val="00E676"/>
+                </a:solidFill>
+              </a:defRPr>
+            </a:pPr>
+            <a:r>
+              <a:t>Troca de Texturas</a:t>
+            </a:r>
+          </a:p>
+        </p:txBody>
+      </p:sp>
+      <p:sp>
+        <p:nvSpPr>
+          <p:cNvPr id="7" name="TextBox 6"/>
+          <p:cNvSpPr txBox="1"/>
+          <p:nvPr/>
+        </p:nvSpPr>
+        <p:spPr>
+          <a:xfrm>
+            <a:off x="6400800" y="1920240"/>
+            <a:ext cx="5029200" cy="2743200"/>
+          </a:xfrm>
+          <a:prstGeom prst="rect">
+            <a:avLst/>
+          </a:prstGeom>
+          <a:noFill/>
+        </p:spPr>
+        <p:txBody>
+          <a:bodyPr wrap="square">
+            <a:spAutoFit/>
+          </a:bodyPr>
+          <a:lstStyle/>
+          <a:p>
+            <a:pPr>
+              <a:spcAft>
+                <a:spcPts val="300"/>
+              </a:spcAft>
+              <a:defRPr sz="1600">
+                <a:solidFill>
+                  <a:srgbClr val="FFFFFF"/>
+                </a:solidFill>
+              </a:defRPr>
+            </a:pPr>
+            <a:r>
+              <a:t>Automatica: textura definida no .mtl</a:t>
+            </a:r>
+          </a:p>
+          <a:p>
+            <a:pPr>
+              <a:spcAft>
+                <a:spcPts val="300"/>
+              </a:spcAft>
+              <a:defRPr sz="1600">
+                <a:solidFill>
+                  <a:srgbClr val="FFFFFF"/>
+                </a:solidFill>
+              </a:defRPr>
+            </a:pPr>
+            <a:r>
+              <a:t>Manual: selecionar no painel ImGui</a:t>
+            </a:r>
+          </a:p>
+          <a:p>
+            <a:pPr>
+              <a:spcAft>
+                <a:spcPts val="300"/>
+              </a:spcAft>
+              <a:defRPr sz="1600">
+                <a:solidFill>
+                  <a:srgbClr val="FFFFFF"/>
+                </a:solidFill>
+              </a:defRPr>
+            </a:pPr>
+            <a:r>
+              <a:t>Opcoes disponiveis:</a:t>
+            </a:r>
+          </a:p>
+          <a:p>
+            <a:pPr>
+              <a:spcAft>
+                <a:spcPts val="300"/>
+              </a:spcAft>
+              <a:defRPr sz="1600">
+                <a:solidFill>
+                  <a:srgbClr val="FFFFFF"/>
+                </a:solidFill>
+              </a:defRPr>
+            </a:pPr>
+            <a:r>
+              <a:t>   Nenhuma (remover textura)</a:t>
+            </a:r>
+          </a:p>
+          <a:p>
+            <a:pPr>
+              <a:spcAft>
+                <a:spcPts val="300"/>
+              </a:spcAft>
+              <a:defRPr sz="1600">
+                <a:solidFill>
+                  <a:srgbClr val="FFFFFF"/>
+                </a:solidFill>
+              </a:defRPr>
+            </a:pPr>
+            <a:r>
+              <a:t>   Pixel Wall (assets/tex/)</a:t>
+            </a:r>
+          </a:p>
+          <a:p>
+            <a:pPr>
+              <a:spcAft>
+                <a:spcPts val="300"/>
+              </a:spcAft>
+              <a:defRPr sz="1600">
+                <a:solidFill>
+                  <a:srgbClr val="FFFFFF"/>
+                </a:solidFill>
+              </a:defRPr>
+            </a:pPr>
+            <a:r>
+              <a:t>   Suzanne (assets/Modelos3D/)</a:t>
+            </a:r>
+          </a:p>
+          <a:p>
+            <a:pPr>
+              <a:spcAft>
+                <a:spcPts val="300"/>
+              </a:spcAft>
+              <a:defRPr sz="1600">
+                <a:solidFill>
+                  <a:srgbClr val="FFFFFF"/>
+                </a:solidFill>
+              </a:defRPr>
+            </a:pPr>
+            <a:r>
+              <a:t>   Suzanne UV</a:t>
+            </a:r>
+          </a:p>
+        </p:txBody>
+      </p:sp>
+      <p:sp>
+        <p:nvSpPr>
+          <p:cNvPr id="8" name="TextBox 7"/>
+          <p:cNvSpPr txBox="1"/>
+          <p:nvPr/>
+        </p:nvSpPr>
+        <p:spPr>
+          <a:xfrm>
+            <a:off x="731520" y="4754880"/>
+            <a:ext cx="10698480" cy="1828800"/>
+          </a:xfrm>
+          <a:prstGeom prst="rect">
+            <a:avLst/>
+          </a:prstGeom>
+          <a:noFill/>
+        </p:spPr>
+        <p:txBody>
+          <a:bodyPr wrap="square">
+            <a:spAutoFit/>
+          </a:bodyPr>
+          <a:lstStyle/>
+          <a:p>
+            <a:pPr>
+              <a:spcAft>
+                <a:spcPts val="200"/>
+              </a:spcAft>
+              <a:defRPr sz="1400">
+                <a:solidFill>
+                  <a:srgbClr val="00E676"/>
+                </a:solidFill>
+                <a:latin typeface="Consolas"/>
+              </a:defRPr>
+            </a:pPr>
+            <a:r>
+              <a:t>// Carregamento de textura com stb_image</a:t>
+            </a:r>
+          </a:p>
+          <a:p>
+            <a:pPr>
+              <a:spcAft>
+                <a:spcPts val="200"/>
+              </a:spcAft>
+              <a:defRPr sz="1400">
+                <a:solidFill>
+                  <a:srgbClr val="00E676"/>
+                </a:solidFill>
+                <a:latin typeface="Consolas"/>
+              </a:defRPr>
+            </a:pPr>
+            <a:r>
+              <a:t>unsigned char *data = stbi_load(filename.c_str(), &amp;width, &amp;height, &amp;nrChannels, 0);</a:t>
+            </a:r>
+          </a:p>
+          <a:p>
+            <a:pPr>
+              <a:spcAft>
+                <a:spcPts val="200"/>
+              </a:spcAft>
+              <a:defRPr sz="1400">
+                <a:solidFill>
+                  <a:srgbClr val="00E676"/>
+                </a:solidFill>
+                <a:latin typeface="Consolas"/>
+              </a:defRPr>
+            </a:pPr>
+            <a:r>
+              <a:t>glTexImage2D(GL_TEXTURE_2D, 0, format, width, height, 0, format, GL_UNSIGNED_BYTE, data);</a:t>
+            </a:r>
+          </a:p>
+          <a:p>
+            <a:pPr>
+              <a:spcAft>
+                <a:spcPts val="200"/>
+              </a:spcAft>
+              <a:defRPr sz="1400">
+                <a:solidFill>
+                  <a:srgbClr val="00E676"/>
+                </a:solidFill>
+                <a:latin typeface="Consolas"/>
+              </a:defRPr>
+            </a:pPr>
+            <a:r>
+              <a:t>glGenerateMipmap(GL_TEXTURE_2D);</a:t>
+            </a:r>
+          </a:p>
+        </p:txBody>
+      </p:sp>
+      <p:sp>
+        <p:nvSpPr>
+          <p:cNvPr id="9" name="Rounded Rectangle 8"/>
+          <p:cNvSpPr/>
+          <p:nvPr/>
+        </p:nvSpPr>
+        <p:spPr>
+          <a:xfrm>
+            <a:off x="640080" y="4663440"/>
+            <a:ext cx="10881359" cy="2011680"/>
+          </a:xfrm>
+          <a:prstGeom prst="roundRect">
+            <a:avLst/>
+          </a:prstGeom>
+          <a:solidFill>
+            <a:srgbClr val="0D1117"/>
+          </a:solidFill>
+          <a:ln>
+            <a:noFill/>
+          </a:ln>
+        </p:spPr>
+        <p:style>
+          <a:lnRef idx="1">
+            <a:schemeClr val="accent1"/>
+          </a:lnRef>
+          <a:fillRef idx="3">
+            <a:schemeClr val="accent1"/>
+          </a:fillRef>
+          <a:effectRef idx="2">
+            <a:schemeClr val="accent1"/>
+          </a:effectRef>
+          <a:fontRef idx="minor">
+            <a:schemeClr val="lt1"/>
+          </a:fontRef>
+        </p:style>
+        <p:txBody>
+          <a:bodyPr rtlCol="0" anchor="ctr"/>
+          <a:lstStyle/>
+          <a:p>
+            <a:pPr algn="ctr"/>
           </a:p>
         </p:txBody>
       </p:sp>
@@ -5582,14 +8866,49 @@
       <p:grpSpPr/>
       <p:sp>
         <p:nvSpPr>
-          <p:cNvPr id="2" name="Rectangle 1"/>
+          <p:cNvPr id="2" name="TextBox 1"/>
+          <p:cNvSpPr txBox="1"/>
+          <p:nvPr/>
+        </p:nvSpPr>
+        <p:spPr>
+          <a:xfrm>
+            <a:off x="731520" y="365760"/>
+            <a:ext cx="10698480" cy="731520"/>
+          </a:xfrm>
+          <a:prstGeom prst="rect">
+            <a:avLst/>
+          </a:prstGeom>
+          <a:noFill/>
+        </p:spPr>
+        <p:txBody>
+          <a:bodyPr wrap="square">
+            <a:spAutoFit/>
+          </a:bodyPr>
+          <a:lstStyle/>
+          <a:p>
+            <a:pPr algn="l">
+              <a:defRPr sz="3600" b="1">
+                <a:solidFill>
+                  <a:srgbClr val="00D2FF"/>
+                </a:solidFill>
+              </a:defRPr>
+            </a:pPr>
+            <a:r>
+              <a:t>Carregamento de Modelos .obj</a:t>
+            </a:r>
+          </a:p>
+        </p:txBody>
+      </p:sp>
+      <p:sp>
+        <p:nvSpPr>
+          <p:cNvPr id="3" name="Rectangle 2"/>
           <p:cNvSpPr/>
           <p:nvPr/>
         </p:nvSpPr>
         <p:spPr>
           <a:xfrm>
-            <a:off x="914400" y="2926080"/>
-            <a:ext cx="10332720" cy="45720"/>
+            <a:off x="731520" y="1097280"/>
+            <a:ext cx="4572000" cy="36576"/>
           </a:xfrm>
           <a:prstGeom prst="rect">
             <a:avLst/>
@@ -5625,14 +8944,14 @@
       </p:sp>
       <p:sp>
         <p:nvSpPr>
-          <p:cNvPr id="3" name="TextBox 2"/>
+          <p:cNvPr id="4" name="TextBox 3"/>
           <p:cNvSpPr txBox="1"/>
           <p:nvPr/>
         </p:nvSpPr>
         <p:spPr>
           <a:xfrm>
-            <a:off x="914400" y="1828800"/>
-            <a:ext cx="10332720" cy="1371600"/>
+            <a:off x="731520" y="1463040"/>
+            <a:ext cx="10698480" cy="1371600"/>
           </a:xfrm>
           <a:prstGeom prst="rect">
             <a:avLst/>
@@ -5645,29 +8964,32 @@
           </a:bodyPr>
           <a:lstStyle/>
           <a:p>
-            <a:pPr algn="ctr">
-              <a:defRPr sz="6000" b="1">
-                <a:solidFill>
-                  <a:srgbClr val="00D2FF"/>
-                </a:solidFill>
-              </a:defRPr>
-            </a:pPr>
-            <a:r>
-              <a:t>Obrigado!</a:t>
-            </a:r>
-          </a:p>
-        </p:txBody>
-      </p:sp>
-      <p:sp>
-        <p:nvSpPr>
-          <p:cNvPr id="4" name="TextBox 3"/>
+            <a:pPr>
+              <a:spcAft>
+                <a:spcPts val="400"/>
+              </a:spcAft>
+              <a:defRPr sz="2000">
+                <a:solidFill>
+                  <a:srgbClr val="FFFFFF"/>
+                </a:solidFill>
+              </a:defRPr>
+            </a:pPr>
+            <a:r>
+              <a:t>Parser completo para arquivos Wavefront (.obj) com suporte a .mtl</a:t>
+            </a:r>
+          </a:p>
+        </p:txBody>
+      </p:sp>
+      <p:sp>
+        <p:nvSpPr>
+          <p:cNvPr id="5" name="TextBox 4"/>
           <p:cNvSpPr txBox="1"/>
           <p:nvPr/>
         </p:nvSpPr>
         <p:spPr>
           <a:xfrm>
-            <a:off x="914400" y="3200400"/>
-            <a:ext cx="10332720" cy="914400"/>
+            <a:off x="731520" y="2286000"/>
+            <a:ext cx="5029200" cy="457200"/>
           </a:xfrm>
           <a:prstGeom prst="rect">
             <a:avLst/>
@@ -5680,29 +9002,29 @@
           </a:bodyPr>
           <a:lstStyle/>
           <a:p>
-            <a:pPr algn="ctr">
-              <a:defRPr sz="2200" b="0">
-                <a:solidFill>
-                  <a:srgbClr val="CCCCCC"/>
-                </a:solidFill>
-              </a:defRPr>
-            </a:pPr>
-            <a:r>
-              <a:t>github.com/amarqs182/CGCCHibrido</a:t>
-            </a:r>
-          </a:p>
-        </p:txBody>
-      </p:sp>
-      <p:sp>
-        <p:nvSpPr>
-          <p:cNvPr id="5" name="TextBox 4"/>
+            <a:pPr algn="l">
+              <a:defRPr sz="2200" b="1">
+                <a:solidFill>
+                  <a:srgbClr val="00E676"/>
+                </a:solidFill>
+              </a:defRPr>
+            </a:pPr>
+            <a:r>
+              <a:t>Dados Extraidos</a:t>
+            </a:r>
+          </a:p>
+        </p:txBody>
+      </p:sp>
+      <p:sp>
+        <p:nvSpPr>
+          <p:cNvPr id="6" name="TextBox 5"/>
           <p:cNvSpPr txBox="1"/>
           <p:nvPr/>
         </p:nvSpPr>
         <p:spPr>
           <a:xfrm>
-            <a:off x="914400" y="4114800"/>
-            <a:ext cx="10332720" cy="914400"/>
+            <a:off x="731520" y="2743200"/>
+            <a:ext cx="5029200" cy="2743200"/>
           </a:xfrm>
           <a:prstGeom prst="rect">
             <a:avLst/>
@@ -5715,16 +9037,357 @@
           </a:bodyPr>
           <a:lstStyle/>
           <a:p>
-            <a:pPr algn="ctr">
-              <a:defRPr sz="2800" b="0">
-                <a:solidFill>
-                  <a:srgbClr val="FFFFFF"/>
-                </a:solidFill>
-              </a:defRPr>
-            </a:pPr>
-            <a:r>
-              <a:t>Perguntas?</a:t>
-            </a:r>
+            <a:pPr>
+              <a:spcAft>
+                <a:spcPts val="300"/>
+              </a:spcAft>
+              <a:defRPr sz="1600">
+                <a:solidFill>
+                  <a:srgbClr val="FFFFFF"/>
+                </a:solidFill>
+              </a:defRPr>
+            </a:pPr>
+            <a:r>
+              <a:t>v  -  Posicoes dos vertices (x, y, z)</a:t>
+            </a:r>
+          </a:p>
+          <a:p>
+            <a:pPr>
+              <a:spcAft>
+                <a:spcPts val="300"/>
+              </a:spcAft>
+              <a:defRPr sz="1600">
+                <a:solidFill>
+                  <a:srgbClr val="FFFFFF"/>
+                </a:solidFill>
+              </a:defRPr>
+            </a:pPr>
+            <a:r>
+              <a:t>vn -  Normais para iluminacao</a:t>
+            </a:r>
+          </a:p>
+          <a:p>
+            <a:pPr>
+              <a:spcAft>
+                <a:spcPts val="300"/>
+              </a:spcAft>
+              <a:defRPr sz="1600">
+                <a:solidFill>
+                  <a:srgbClr val="FFFFFF"/>
+                </a:solidFill>
+              </a:defRPr>
+            </a:pPr>
+            <a:r>
+              <a:t>vt -  Coordenadas de textura (u, v)</a:t>
+            </a:r>
+          </a:p>
+          <a:p>
+            <a:pPr>
+              <a:spcAft>
+                <a:spcPts val="300"/>
+              </a:spcAft>
+              <a:defRPr sz="1600">
+                <a:solidFill>
+                  <a:srgbClr val="FFFFFF"/>
+                </a:solidFill>
+              </a:defRPr>
+            </a:pPr>
+            <a:r>
+              <a:t>f  -  Faces (indices dos vertices)</a:t>
+            </a:r>
+          </a:p>
+          <a:p>
+            <a:pPr>
+              <a:spcAft>
+                <a:spcPts val="300"/>
+              </a:spcAft>
+              <a:defRPr sz="1600">
+                <a:solidFill>
+                  <a:srgbClr val="FFFFFF"/>
+                </a:solidFill>
+              </a:defRPr>
+            </a:pPr>
+            <a:r>
+              <a:t>mtllib  -  Arquivo de material</a:t>
+            </a:r>
+          </a:p>
+          <a:p>
+            <a:pPr>
+              <a:spcAft>
+                <a:spcPts val="300"/>
+              </a:spcAft>
+              <a:defRPr sz="1600">
+                <a:solidFill>
+                  <a:srgbClr val="FFFFFF"/>
+                </a:solidFill>
+              </a:defRPr>
+            </a:pPr>
+            <a:r>
+              <a:t>usemtl  -  Material aplicado</a:t>
+            </a:r>
+          </a:p>
+        </p:txBody>
+      </p:sp>
+      <p:sp>
+        <p:nvSpPr>
+          <p:cNvPr id="7" name="TextBox 6"/>
+          <p:cNvSpPr txBox="1"/>
+          <p:nvPr/>
+        </p:nvSpPr>
+        <p:spPr>
+          <a:xfrm>
+            <a:off x="6400800" y="2286000"/>
+            <a:ext cx="5029200" cy="457200"/>
+          </a:xfrm>
+          <a:prstGeom prst="rect">
+            <a:avLst/>
+          </a:prstGeom>
+          <a:noFill/>
+        </p:spPr>
+        <p:txBody>
+          <a:bodyPr wrap="square">
+            <a:spAutoFit/>
+          </a:bodyPr>
+          <a:lstStyle/>
+          <a:p>
+            <a:pPr algn="l">
+              <a:defRPr sz="2200" b="1">
+                <a:solidFill>
+                  <a:srgbClr val="00E676"/>
+                </a:solidFill>
+              </a:defRPr>
+            </a:pPr>
+            <a:r>
+              <a:t>Modelo: Suzanne</a:t>
+            </a:r>
+          </a:p>
+        </p:txBody>
+      </p:sp>
+      <p:sp>
+        <p:nvSpPr>
+          <p:cNvPr id="8" name="TextBox 7"/>
+          <p:cNvSpPr txBox="1"/>
+          <p:nvPr/>
+        </p:nvSpPr>
+        <p:spPr>
+          <a:xfrm>
+            <a:off x="6400800" y="2743200"/>
+            <a:ext cx="5029200" cy="2743200"/>
+          </a:xfrm>
+          <a:prstGeom prst="rect">
+            <a:avLst/>
+          </a:prstGeom>
+          <a:noFill/>
+        </p:spPr>
+        <p:txBody>
+          <a:bodyPr wrap="square">
+            <a:spAutoFit/>
+          </a:bodyPr>
+          <a:lstStyle/>
+          <a:p>
+            <a:pPr>
+              <a:spcAft>
+                <a:spcPts val="300"/>
+              </a:spcAft>
+              <a:defRPr sz="1600">
+                <a:solidFill>
+                  <a:srgbClr val="FFFFFF"/>
+                </a:solidFill>
+              </a:defRPr>
+            </a:pPr>
+            <a:r>
+              <a:t>555 vertices</a:t>
+            </a:r>
+          </a:p>
+          <a:p>
+            <a:pPr>
+              <a:spcAft>
+                <a:spcPts val="300"/>
+              </a:spcAft>
+              <a:defRPr sz="1600">
+                <a:solidFill>
+                  <a:srgbClr val="FFFFFF"/>
+                </a:solidFill>
+              </a:defRPr>
+            </a:pPr>
+            <a:r>
+              <a:t>2901 indices</a:t>
+            </a:r>
+          </a:p>
+          <a:p>
+            <a:pPr>
+              <a:spcAft>
+                <a:spcPts val="300"/>
+              </a:spcAft>
+              <a:defRPr sz="1600">
+                <a:solidFill>
+                  <a:srgbClr val="FFFFFF"/>
+                </a:solidFill>
+              </a:defRPr>
+            </a:pPr>
+            <a:r>
+              <a:t>1 material (Material.001)</a:t>
+            </a:r>
+          </a:p>
+          <a:p>
+            <a:pPr>
+              <a:spcAft>
+                <a:spcPts val="300"/>
+              </a:spcAft>
+              <a:defRPr sz="1600">
+                <a:solidFill>
+                  <a:srgbClr val="FFFFFF"/>
+                </a:solidFill>
+              </a:defRPr>
+            </a:pPr>
+            <a:r>
+              <a:t>Textura: Suzanne.png</a:t>
+            </a:r>
+          </a:p>
+          <a:p>
+            <a:pPr>
+              <a:spcAft>
+                <a:spcPts val="300"/>
+              </a:spcAft>
+              <a:defRPr sz="1600">
+                <a:solidFill>
+                  <a:srgbClr val="FFFFFF"/>
+                </a:solidFill>
+              </a:defRPr>
+            </a:pPr>
+            <a:r>
+              <a:t>Carregado automaticamente</a:t>
+            </a:r>
+          </a:p>
+        </p:txBody>
+      </p:sp>
+      <p:sp>
+        <p:nvSpPr>
+          <p:cNvPr id="9" name="TextBox 8"/>
+          <p:cNvSpPr txBox="1"/>
+          <p:nvPr/>
+        </p:nvSpPr>
+        <p:spPr>
+          <a:xfrm>
+            <a:off x="731520" y="5029200"/>
+            <a:ext cx="10698480" cy="1371600"/>
+          </a:xfrm>
+          <a:prstGeom prst="rect">
+            <a:avLst/>
+          </a:prstGeom>
+          <a:noFill/>
+        </p:spPr>
+        <p:txBody>
+          <a:bodyPr wrap="square">
+            <a:spAutoFit/>
+          </a:bodyPr>
+          <a:lstStyle/>
+          <a:p>
+            <a:pPr>
+              <a:spcAft>
+                <a:spcPts val="200"/>
+              </a:spcAft>
+              <a:defRPr sz="1400">
+                <a:solidFill>
+                  <a:srgbClr val="00E676"/>
+                </a:solidFill>
+                <a:latin typeface="Consolas"/>
+              </a:defRPr>
+            </a:pPr>
+            <a:r>
+              <a:t>// Carregamento do modelo</a:t>
+            </a:r>
+          </a:p>
+          <a:p>
+            <a:pPr>
+              <a:spcAft>
+                <a:spcPts val="200"/>
+              </a:spcAft>
+              <a:defRPr sz="1400">
+                <a:solidFill>
+                  <a:srgbClr val="00E676"/>
+                </a:solidFill>
+                <a:latin typeface="Consolas"/>
+              </a:defRPr>
+            </a:pPr>
+            <a:r>
+              <a:t>renderObj.objMesh = ObjParser::loadFromFile(obj-&gt;texture);</a:t>
+            </a:r>
+          </a:p>
+          <a:p>
+            <a:pPr>
+              <a:spcAft>
+                <a:spcPts val="200"/>
+              </a:spcAft>
+              <a:defRPr sz="1400">
+                <a:solidFill>
+                  <a:srgbClr val="00E676"/>
+                </a:solidFill>
+                <a:latin typeface="Consolas"/>
+              </a:defRPr>
+            </a:pPr>
+            <a:r>
+              <a:t>string texPath = ObjParser::getTexturePath(renderObj.objMesh);</a:t>
+            </a:r>
+          </a:p>
+          <a:p>
+            <a:pPr>
+              <a:spcAft>
+                <a:spcPts val="200"/>
+              </a:spcAft>
+              <a:defRPr sz="1400">
+                <a:solidFill>
+                  <a:srgbClr val="00E676"/>
+                </a:solidFill>
+                <a:latin typeface="Consolas"/>
+              </a:defRPr>
+            </a:pPr>
+            <a:r>
+              <a:t>renderObj.textureID = carregaTextura(texPath);</a:t>
+            </a:r>
+          </a:p>
+        </p:txBody>
+      </p:sp>
+      <p:sp>
+        <p:nvSpPr>
+          <p:cNvPr id="10" name="Rounded Rectangle 9"/>
+          <p:cNvSpPr/>
+          <p:nvPr/>
+        </p:nvSpPr>
+        <p:spPr>
+          <a:xfrm>
+            <a:off x="640080" y="4937760"/>
+            <a:ext cx="10881359" cy="1554480"/>
+          </a:xfrm>
+          <a:prstGeom prst="roundRect">
+            <a:avLst/>
+          </a:prstGeom>
+          <a:solidFill>
+            <a:srgbClr val="0D1117"/>
+          </a:solidFill>
+          <a:ln>
+            <a:noFill/>
+          </a:ln>
+        </p:spPr>
+        <p:style>
+          <a:lnRef idx="1">
+            <a:schemeClr val="accent1"/>
+          </a:lnRef>
+          <a:fillRef idx="3">
+            <a:schemeClr val="accent1"/>
+          </a:fillRef>
+          <a:effectRef idx="2">
+            <a:schemeClr val="accent1"/>
+          </a:effectRef>
+          <a:fontRef idx="minor">
+            <a:schemeClr val="lt1"/>
+          </a:fontRef>
+        </p:style>
+        <p:txBody>
+          <a:bodyPr rtlCol="0" anchor="ctr"/>
+          <a:lstStyle/>
+          <a:p>
+            <a:pPr algn="ctr"/>
           </a:p>
         </p:txBody>
       </p:sp>

--- a/apresentacao.pptx
+++ b/apresentacao.pptx
@@ -4058,7 +4058,7 @@
               </a:defRPr>
             </a:pPr>
             <a:r>
-              <a:t>Crash发生在 4-8 segundos apos inicio</a:t>
+              <a:t>Crash apos 4-8 segundos do inicio</a:t>
             </a:r>
           </a:p>
           <a:p>
@@ -4791,7 +4791,7 @@
               </a:defRPr>
             </a:pPr>
             <a:r>
-              <a:t>Suzanne  -  Blender (开源, CC-BY)</a:t>
+              <a:t>Suzanne  -  Blender (open source, CC-BY)</a:t>
             </a:r>
           </a:p>
           <a:p>

--- a/apresentacao.pptx
+++ b/apresentacao.pptx
@@ -5077,7 +5077,7 @@
         <p:spPr>
           <a:xfrm>
             <a:off x="914400" y="4114800"/>
-            <a:ext cx="10332720" cy="914400"/>
+            <a:ext cx="10332720" cy="548640"/>
           </a:xfrm>
           <a:prstGeom prst="rect">
             <a:avLst/>
@@ -5091,14 +5091,14 @@
           <a:lstStyle/>
           <a:p>
             <a:pPr algn="ctr">
-              <a:defRPr sz="2800" b="0">
-                <a:solidFill>
-                  <a:srgbClr val="FFFFFF"/>
-                </a:solidFill>
-              </a:defRPr>
-            </a:pPr>
-            <a:r>
-              <a:t>Perguntas?</a:t>
+              <a:defRPr sz="1800" b="0">
+                <a:solidFill>
+                  <a:srgbClr val="CCCCCC"/>
+                </a:solidFill>
+              </a:defRPr>
+            </a:pPr>
+            <a:r>
+              <a:t>Tarefas: github.com/amarqs182/Tarefas-CG</a:t>
             </a:r>
           </a:p>
         </p:txBody>
